--- a/docs/pptx/carbo/ritu-carbo-linsubhr-sens-anemia2.pptx
+++ b/docs/pptx/carbo/ritu-carbo-linsubhr-sens-anemia2.pptx
@@ -2443,7 +2443,7 @@
           </p:nvSpPr>
           <p:spPr>
             <a:xfrm>
-              <a:off x="868706" y="2073503"/>
+              <a:off x="869934" y="2073503"/>
               <a:ext cx="0" cy="3649639"/>
             </a:xfrm>
             <a:custGeom>
@@ -2486,7 +2486,7 @@
           </p:nvSpPr>
           <p:spPr>
             <a:xfrm>
-              <a:off x="2695888" y="2073503"/>
+              <a:off x="2693907" y="2073503"/>
               <a:ext cx="0" cy="3649639"/>
             </a:xfrm>
             <a:custGeom>
@@ -2529,7 +2529,7 @@
           </p:nvSpPr>
           <p:spPr>
             <a:xfrm>
-              <a:off x="4523069" y="2073503"/>
+              <a:off x="4517879" y="2073503"/>
               <a:ext cx="0" cy="3649639"/>
             </a:xfrm>
             <a:custGeom>
@@ -2572,7 +2572,7 @@
           </p:nvSpPr>
           <p:spPr>
             <a:xfrm>
-              <a:off x="6350251" y="2073503"/>
+              <a:off x="6341852" y="2073503"/>
               <a:ext cx="0" cy="3649639"/>
             </a:xfrm>
             <a:custGeom>
@@ -2615,7 +2615,7 @@
           </p:nvSpPr>
           <p:spPr>
             <a:xfrm>
-              <a:off x="8177433" y="2073503"/>
+              <a:off x="8165824" y="2073503"/>
               <a:ext cx="0" cy="3649639"/>
             </a:xfrm>
             <a:custGeom>
@@ -2873,7 +2873,7 @@
           </p:nvSpPr>
           <p:spPr>
             <a:xfrm>
-              <a:off x="1782297" y="2073503"/>
+              <a:off x="1781921" y="2073503"/>
               <a:ext cx="0" cy="3649639"/>
             </a:xfrm>
             <a:custGeom>
@@ -2916,7 +2916,7 @@
           </p:nvSpPr>
           <p:spPr>
             <a:xfrm>
-              <a:off x="3609478" y="2073503"/>
+              <a:off x="3605893" y="2073503"/>
               <a:ext cx="0" cy="3649639"/>
             </a:xfrm>
             <a:custGeom>
@@ -2959,7 +2959,7 @@
           </p:nvSpPr>
           <p:spPr>
             <a:xfrm>
-              <a:off x="5436660" y="2073503"/>
+              <a:off x="5429866" y="2073503"/>
               <a:ext cx="0" cy="3649639"/>
             </a:xfrm>
             <a:custGeom>
@@ -3002,7 +3002,7 @@
           </p:nvSpPr>
           <p:spPr>
             <a:xfrm>
-              <a:off x="7263842" y="2073503"/>
+              <a:off x="7253838" y="2073503"/>
               <a:ext cx="0" cy="3649639"/>
             </a:xfrm>
             <a:custGeom>
@@ -3045,612 +3045,612 @@
           </p:nvSpPr>
           <p:spPr>
             <a:xfrm>
-              <a:off x="1172049" y="3057521"/>
-              <a:ext cx="7090630" cy="2238941"/>
+              <a:off x="1172049" y="3054079"/>
+              <a:ext cx="7090630" cy="2240079"/>
             </a:xfrm>
             <a:custGeom>
               <a:avLst/>
               <a:pathLst>
-                <a:path w="7090630" h="2238941">
+                <a:path w="7090630" h="2240079">
                   <a:moveTo>
                     <a:pt x="0" y="0"/>
                   </a:moveTo>
                   <a:lnTo>
-                    <a:pt x="71622" y="56423"/>
-                  </a:lnTo>
-                  <a:lnTo>
-                    <a:pt x="143245" y="111574"/>
-                  </a:lnTo>
-                  <a:lnTo>
-                    <a:pt x="214867" y="165479"/>
-                  </a:lnTo>
-                  <a:lnTo>
-                    <a:pt x="286490" y="218168"/>
-                  </a:lnTo>
-                  <a:lnTo>
-                    <a:pt x="358112" y="269667"/>
-                  </a:lnTo>
-                  <a:lnTo>
-                    <a:pt x="429735" y="320004"/>
-                  </a:lnTo>
-                  <a:lnTo>
-                    <a:pt x="501357" y="369205"/>
-                  </a:lnTo>
-                  <a:lnTo>
-                    <a:pt x="572980" y="417295"/>
-                  </a:lnTo>
-                  <a:lnTo>
-                    <a:pt x="644602" y="464300"/>
-                  </a:lnTo>
-                  <a:lnTo>
-                    <a:pt x="716225" y="510244"/>
-                  </a:lnTo>
-                  <a:lnTo>
-                    <a:pt x="787847" y="555150"/>
-                  </a:lnTo>
-                  <a:lnTo>
-                    <a:pt x="859470" y="599043"/>
-                  </a:lnTo>
-                  <a:lnTo>
-                    <a:pt x="931092" y="641945"/>
-                  </a:lnTo>
-                  <a:lnTo>
-                    <a:pt x="1002715" y="683879"/>
-                  </a:lnTo>
-                  <a:lnTo>
-                    <a:pt x="1074337" y="724867"/>
-                  </a:lnTo>
-                  <a:lnTo>
-                    <a:pt x="1145960" y="764929"/>
-                  </a:lnTo>
-                  <a:lnTo>
-                    <a:pt x="1217582" y="804087"/>
-                  </a:lnTo>
-                  <a:lnTo>
-                    <a:pt x="1289205" y="842361"/>
-                  </a:lnTo>
-                  <a:lnTo>
-                    <a:pt x="1360827" y="879771"/>
-                  </a:lnTo>
-                  <a:lnTo>
-                    <a:pt x="1432450" y="916337"/>
-                  </a:lnTo>
-                  <a:lnTo>
-                    <a:pt x="1504073" y="952077"/>
-                  </a:lnTo>
-                  <a:lnTo>
-                    <a:pt x="1575695" y="987011"/>
-                  </a:lnTo>
-                  <a:lnTo>
-                    <a:pt x="1647318" y="1021156"/>
-                  </a:lnTo>
-                  <a:lnTo>
-                    <a:pt x="1718940" y="1054530"/>
-                  </a:lnTo>
-                  <a:lnTo>
-                    <a:pt x="1790563" y="1087151"/>
-                  </a:lnTo>
-                  <a:lnTo>
-                    <a:pt x="1862185" y="1119036"/>
-                  </a:lnTo>
-                  <a:lnTo>
-                    <a:pt x="1933808" y="1150201"/>
-                  </a:lnTo>
-                  <a:lnTo>
-                    <a:pt x="2005430" y="1180662"/>
-                  </a:lnTo>
-                  <a:lnTo>
-                    <a:pt x="2077053" y="1210436"/>
-                  </a:lnTo>
-                  <a:lnTo>
-                    <a:pt x="2148675" y="1239538"/>
-                  </a:lnTo>
-                  <a:lnTo>
-                    <a:pt x="2220298" y="1267983"/>
-                  </a:lnTo>
-                  <a:lnTo>
-                    <a:pt x="2291920" y="1295786"/>
-                  </a:lnTo>
-                  <a:lnTo>
-                    <a:pt x="2363543" y="1322961"/>
-                  </a:lnTo>
-                  <a:lnTo>
-                    <a:pt x="2435165" y="1349523"/>
-                  </a:lnTo>
-                  <a:lnTo>
-                    <a:pt x="2506788" y="1375486"/>
-                  </a:lnTo>
-                  <a:lnTo>
-                    <a:pt x="2578410" y="1400862"/>
-                  </a:lnTo>
-                  <a:lnTo>
-                    <a:pt x="2650033" y="1425666"/>
-                  </a:lnTo>
-                  <a:lnTo>
-                    <a:pt x="2721655" y="1449910"/>
-                  </a:lnTo>
-                  <a:lnTo>
-                    <a:pt x="2793278" y="1473606"/>
-                  </a:lnTo>
-                  <a:lnTo>
-                    <a:pt x="2864901" y="1496768"/>
-                  </a:lnTo>
-                  <a:lnTo>
-                    <a:pt x="2936523" y="1519407"/>
-                  </a:lnTo>
-                  <a:lnTo>
-                    <a:pt x="3008146" y="1541534"/>
-                  </a:lnTo>
-                  <a:lnTo>
-                    <a:pt x="3079768" y="1563163"/>
-                  </a:lnTo>
-                  <a:lnTo>
-                    <a:pt x="3151391" y="1584303"/>
-                  </a:lnTo>
-                  <a:lnTo>
-                    <a:pt x="3223013" y="1604966"/>
-                  </a:lnTo>
-                  <a:lnTo>
-                    <a:pt x="3294636" y="1625163"/>
-                  </a:lnTo>
-                  <a:lnTo>
-                    <a:pt x="3366258" y="1644903"/>
-                  </a:lnTo>
-                  <a:lnTo>
-                    <a:pt x="3437881" y="1664198"/>
-                  </a:lnTo>
-                  <a:lnTo>
-                    <a:pt x="3509503" y="1670865"/>
-                  </a:lnTo>
-                  <a:lnTo>
-                    <a:pt x="3581126" y="1671745"/>
-                  </a:lnTo>
-                  <a:lnTo>
-                    <a:pt x="3652748" y="1672625"/>
-                  </a:lnTo>
-                  <a:lnTo>
-                    <a:pt x="3724371" y="1673504"/>
-                  </a:lnTo>
-                  <a:lnTo>
-                    <a:pt x="3795993" y="1674382"/>
-                  </a:lnTo>
-                  <a:lnTo>
-                    <a:pt x="3867616" y="1675260"/>
-                  </a:lnTo>
-                  <a:lnTo>
-                    <a:pt x="3939238" y="1676136"/>
-                  </a:lnTo>
-                  <a:lnTo>
-                    <a:pt x="4010861" y="1677011"/>
-                  </a:lnTo>
-                  <a:lnTo>
-                    <a:pt x="4082483" y="1677885"/>
-                  </a:lnTo>
-                  <a:lnTo>
-                    <a:pt x="4154106" y="1678759"/>
-                  </a:lnTo>
-                  <a:lnTo>
-                    <a:pt x="4225729" y="1679631"/>
-                  </a:lnTo>
-                  <a:lnTo>
-                    <a:pt x="4297351" y="1680503"/>
-                  </a:lnTo>
-                  <a:lnTo>
-                    <a:pt x="4368974" y="1681373"/>
-                  </a:lnTo>
-                  <a:lnTo>
-                    <a:pt x="4440596" y="1682243"/>
-                  </a:lnTo>
-                  <a:lnTo>
-                    <a:pt x="4512219" y="1683112"/>
-                  </a:lnTo>
-                  <a:lnTo>
-                    <a:pt x="4583841" y="1683980"/>
-                  </a:lnTo>
-                  <a:lnTo>
-                    <a:pt x="4655464" y="1684847"/>
-                  </a:lnTo>
-                  <a:lnTo>
-                    <a:pt x="4727086" y="1685713"/>
-                  </a:lnTo>
-                  <a:lnTo>
-                    <a:pt x="4798709" y="1686578"/>
-                  </a:lnTo>
-                  <a:lnTo>
-                    <a:pt x="4870331" y="1687442"/>
-                  </a:lnTo>
-                  <a:lnTo>
-                    <a:pt x="4941954" y="1688305"/>
-                  </a:lnTo>
-                  <a:lnTo>
-                    <a:pt x="5013576" y="1689167"/>
-                  </a:lnTo>
-                  <a:lnTo>
-                    <a:pt x="5085199" y="1690029"/>
-                  </a:lnTo>
-                  <a:lnTo>
-                    <a:pt x="5156821" y="1690889"/>
-                  </a:lnTo>
-                  <a:lnTo>
-                    <a:pt x="5228444" y="1691749"/>
-                  </a:lnTo>
-                  <a:lnTo>
-                    <a:pt x="5300066" y="1692608"/>
-                  </a:lnTo>
-                  <a:lnTo>
-                    <a:pt x="5371689" y="1693465"/>
-                  </a:lnTo>
-                  <a:lnTo>
-                    <a:pt x="5443311" y="1694322"/>
-                  </a:lnTo>
-                  <a:lnTo>
-                    <a:pt x="5514934" y="1695178"/>
-                  </a:lnTo>
-                  <a:lnTo>
-                    <a:pt x="5586557" y="1696033"/>
-                  </a:lnTo>
-                  <a:lnTo>
-                    <a:pt x="5658179" y="1696887"/>
-                  </a:lnTo>
-                  <a:lnTo>
-                    <a:pt x="5729802" y="1697741"/>
-                  </a:lnTo>
-                  <a:lnTo>
-                    <a:pt x="5801424" y="1698593"/>
-                  </a:lnTo>
-                  <a:lnTo>
-                    <a:pt x="5873047" y="1699444"/>
-                  </a:lnTo>
-                  <a:lnTo>
-                    <a:pt x="5944669" y="1700295"/>
-                  </a:lnTo>
-                  <a:lnTo>
-                    <a:pt x="6016292" y="1701144"/>
-                  </a:lnTo>
-                  <a:lnTo>
-                    <a:pt x="6087914" y="1701993"/>
-                  </a:lnTo>
-                  <a:lnTo>
-                    <a:pt x="6159537" y="1702841"/>
-                  </a:lnTo>
-                  <a:lnTo>
-                    <a:pt x="6231159" y="1703688"/>
-                  </a:lnTo>
-                  <a:lnTo>
-                    <a:pt x="6302782" y="1704534"/>
-                  </a:lnTo>
-                  <a:lnTo>
-                    <a:pt x="6374404" y="1705379"/>
-                  </a:lnTo>
-                  <a:lnTo>
-                    <a:pt x="6446027" y="1706223"/>
-                  </a:lnTo>
-                  <a:lnTo>
-                    <a:pt x="6517649" y="1707066"/>
-                  </a:lnTo>
-                  <a:lnTo>
-                    <a:pt x="6589272" y="1707909"/>
-                  </a:lnTo>
-                  <a:lnTo>
-                    <a:pt x="6660894" y="1708750"/>
-                  </a:lnTo>
-                  <a:lnTo>
-                    <a:pt x="6732517" y="1709591"/>
-                  </a:lnTo>
-                  <a:lnTo>
-                    <a:pt x="6804139" y="1710430"/>
-                  </a:lnTo>
-                  <a:lnTo>
-                    <a:pt x="6875762" y="1711269"/>
-                  </a:lnTo>
-                  <a:lnTo>
-                    <a:pt x="6947385" y="1712107"/>
-                  </a:lnTo>
-                  <a:lnTo>
-                    <a:pt x="7019007" y="1712944"/>
-                  </a:lnTo>
-                  <a:lnTo>
-                    <a:pt x="7090630" y="1713780"/>
-                  </a:lnTo>
-                  <a:lnTo>
-                    <a:pt x="7090630" y="2238941"/>
-                  </a:lnTo>
-                  <a:lnTo>
-                    <a:pt x="7019007" y="2232919"/>
-                  </a:lnTo>
-                  <a:lnTo>
-                    <a:pt x="6947385" y="2226757"/>
-                  </a:lnTo>
-                  <a:lnTo>
-                    <a:pt x="6875762" y="2220454"/>
-                  </a:lnTo>
-                  <a:lnTo>
-                    <a:pt x="6804139" y="2214004"/>
-                  </a:lnTo>
-                  <a:lnTo>
-                    <a:pt x="6732517" y="2207406"/>
-                  </a:lnTo>
-                  <a:lnTo>
-                    <a:pt x="6660894" y="2200655"/>
-                  </a:lnTo>
-                  <a:lnTo>
-                    <a:pt x="6589272" y="2193749"/>
-                  </a:lnTo>
-                  <a:lnTo>
-                    <a:pt x="6517649" y="2186683"/>
-                  </a:lnTo>
-                  <a:lnTo>
-                    <a:pt x="6446027" y="2179453"/>
-                  </a:lnTo>
-                  <a:lnTo>
-                    <a:pt x="6374404" y="2172057"/>
-                  </a:lnTo>
-                  <a:lnTo>
-                    <a:pt x="6302782" y="2164490"/>
-                  </a:lnTo>
-                  <a:lnTo>
-                    <a:pt x="6231159" y="2156749"/>
-                  </a:lnTo>
-                  <a:lnTo>
-                    <a:pt x="6159537" y="2148828"/>
-                  </a:lnTo>
-                  <a:lnTo>
-                    <a:pt x="6087914" y="2140725"/>
-                  </a:lnTo>
-                  <a:lnTo>
-                    <a:pt x="6016292" y="2132434"/>
-                  </a:lnTo>
-                  <a:lnTo>
-                    <a:pt x="5944669" y="2123952"/>
-                  </a:lnTo>
-                  <a:lnTo>
-                    <a:pt x="5873047" y="2115274"/>
-                  </a:lnTo>
-                  <a:lnTo>
-                    <a:pt x="5801424" y="2106396"/>
-                  </a:lnTo>
-                  <a:lnTo>
-                    <a:pt x="5729802" y="2097313"/>
-                  </a:lnTo>
-                  <a:lnTo>
-                    <a:pt x="5658179" y="2088019"/>
-                  </a:lnTo>
-                  <a:lnTo>
-                    <a:pt x="5586557" y="2078512"/>
-                  </a:lnTo>
-                  <a:lnTo>
-                    <a:pt x="5514934" y="2068785"/>
-                  </a:lnTo>
-                  <a:lnTo>
-                    <a:pt x="5443311" y="2058833"/>
-                  </a:lnTo>
-                  <a:lnTo>
-                    <a:pt x="5371689" y="2048651"/>
-                  </a:lnTo>
-                  <a:lnTo>
-                    <a:pt x="5300066" y="2038234"/>
-                  </a:lnTo>
-                  <a:lnTo>
-                    <a:pt x="5228444" y="2027577"/>
-                  </a:lnTo>
-                  <a:lnTo>
-                    <a:pt x="5156821" y="2016673"/>
-                  </a:lnTo>
-                  <a:lnTo>
-                    <a:pt x="5085199" y="2005518"/>
-                  </a:lnTo>
-                  <a:lnTo>
-                    <a:pt x="5013576" y="1994105"/>
-                  </a:lnTo>
-                  <a:lnTo>
-                    <a:pt x="4941954" y="1982428"/>
-                  </a:lnTo>
-                  <a:lnTo>
-                    <a:pt x="4870331" y="1970482"/>
-                  </a:lnTo>
-                  <a:lnTo>
-                    <a:pt x="4798709" y="1958260"/>
-                  </a:lnTo>
-                  <a:lnTo>
-                    <a:pt x="4727086" y="1945756"/>
-                  </a:lnTo>
-                  <a:lnTo>
-                    <a:pt x="4655464" y="1932963"/>
-                  </a:lnTo>
-                  <a:lnTo>
-                    <a:pt x="4583841" y="1919875"/>
-                  </a:lnTo>
-                  <a:lnTo>
-                    <a:pt x="4512219" y="1906484"/>
-                  </a:lnTo>
-                  <a:lnTo>
-                    <a:pt x="4440596" y="1892784"/>
-                  </a:lnTo>
-                  <a:lnTo>
-                    <a:pt x="4368974" y="1878768"/>
-                  </a:lnTo>
-                  <a:lnTo>
-                    <a:pt x="4297351" y="1864428"/>
-                  </a:lnTo>
-                  <a:lnTo>
-                    <a:pt x="4225729" y="1849756"/>
-                  </a:lnTo>
-                  <a:lnTo>
-                    <a:pt x="4154106" y="1834746"/>
-                  </a:lnTo>
-                  <a:lnTo>
-                    <a:pt x="4082483" y="1819390"/>
-                  </a:lnTo>
-                  <a:lnTo>
-                    <a:pt x="4010861" y="1803679"/>
-                  </a:lnTo>
-                  <a:lnTo>
-                    <a:pt x="3939238" y="1787605"/>
-                  </a:lnTo>
-                  <a:lnTo>
-                    <a:pt x="3867616" y="1771159"/>
-                  </a:lnTo>
-                  <a:lnTo>
-                    <a:pt x="3795993" y="1754334"/>
-                  </a:lnTo>
-                  <a:lnTo>
-                    <a:pt x="3724371" y="1737121"/>
-                  </a:lnTo>
-                  <a:lnTo>
-                    <a:pt x="3652748" y="1719510"/>
-                  </a:lnTo>
-                  <a:lnTo>
-                    <a:pt x="3581126" y="1701492"/>
-                  </a:lnTo>
-                  <a:lnTo>
-                    <a:pt x="3509503" y="1683058"/>
-                  </a:lnTo>
-                  <a:lnTo>
-                    <a:pt x="3437881" y="1669983"/>
-                  </a:lnTo>
-                  <a:lnTo>
-                    <a:pt x="3366258" y="1669100"/>
-                  </a:lnTo>
-                  <a:lnTo>
-                    <a:pt x="3294636" y="1668216"/>
-                  </a:lnTo>
-                  <a:lnTo>
-                    <a:pt x="3223013" y="1667332"/>
-                  </a:lnTo>
-                  <a:lnTo>
-                    <a:pt x="3151391" y="1666446"/>
-                  </a:lnTo>
-                  <a:lnTo>
-                    <a:pt x="3079768" y="1665560"/>
-                  </a:lnTo>
-                  <a:lnTo>
-                    <a:pt x="3008146" y="1664672"/>
-                  </a:lnTo>
-                  <a:lnTo>
-                    <a:pt x="2936523" y="1663784"/>
-                  </a:lnTo>
-                  <a:lnTo>
-                    <a:pt x="2864901" y="1662894"/>
-                  </a:lnTo>
-                  <a:lnTo>
-                    <a:pt x="2793278" y="1662004"/>
-                  </a:lnTo>
-                  <a:lnTo>
-                    <a:pt x="2721655" y="1661113"/>
-                  </a:lnTo>
-                  <a:lnTo>
-                    <a:pt x="2650033" y="1660221"/>
-                  </a:lnTo>
-                  <a:lnTo>
-                    <a:pt x="2578410" y="1659328"/>
-                  </a:lnTo>
-                  <a:lnTo>
-                    <a:pt x="2506788" y="1658434"/>
-                  </a:lnTo>
-                  <a:lnTo>
-                    <a:pt x="2435165" y="1657539"/>
-                  </a:lnTo>
-                  <a:lnTo>
-                    <a:pt x="2363543" y="1656643"/>
-                  </a:lnTo>
-                  <a:lnTo>
-                    <a:pt x="2291920" y="1655746"/>
-                  </a:lnTo>
-                  <a:lnTo>
-                    <a:pt x="2220298" y="1654848"/>
-                  </a:lnTo>
-                  <a:lnTo>
-                    <a:pt x="2148675" y="1653949"/>
-                  </a:lnTo>
-                  <a:lnTo>
-                    <a:pt x="2077053" y="1653049"/>
-                  </a:lnTo>
-                  <a:lnTo>
-                    <a:pt x="2005430" y="1652148"/>
-                  </a:lnTo>
-                  <a:lnTo>
-                    <a:pt x="1933808" y="1651247"/>
-                  </a:lnTo>
-                  <a:lnTo>
-                    <a:pt x="1862185" y="1650344"/>
-                  </a:lnTo>
-                  <a:lnTo>
-                    <a:pt x="1790563" y="1649440"/>
-                  </a:lnTo>
-                  <a:lnTo>
-                    <a:pt x="1718940" y="1648536"/>
-                  </a:lnTo>
-                  <a:lnTo>
-                    <a:pt x="1647318" y="1647630"/>
-                  </a:lnTo>
-                  <a:lnTo>
-                    <a:pt x="1575695" y="1646724"/>
-                  </a:lnTo>
-                  <a:lnTo>
-                    <a:pt x="1504073" y="1645816"/>
-                  </a:lnTo>
-                  <a:lnTo>
-                    <a:pt x="1432450" y="1644908"/>
-                  </a:lnTo>
-                  <a:lnTo>
-                    <a:pt x="1360827" y="1643998"/>
-                  </a:lnTo>
-                  <a:lnTo>
-                    <a:pt x="1289205" y="1643088"/>
-                  </a:lnTo>
-                  <a:lnTo>
-                    <a:pt x="1217582" y="1642177"/>
-                  </a:lnTo>
-                  <a:lnTo>
-                    <a:pt x="1145960" y="1641264"/>
-                  </a:lnTo>
-                  <a:lnTo>
-                    <a:pt x="1074337" y="1640351"/>
-                  </a:lnTo>
-                  <a:lnTo>
-                    <a:pt x="1002715" y="1639437"/>
-                  </a:lnTo>
-                  <a:lnTo>
-                    <a:pt x="931092" y="1638521"/>
-                  </a:lnTo>
-                  <a:lnTo>
-                    <a:pt x="859470" y="1637605"/>
-                  </a:lnTo>
-                  <a:lnTo>
-                    <a:pt x="787847" y="1636688"/>
-                  </a:lnTo>
-                  <a:lnTo>
-                    <a:pt x="716225" y="1635770"/>
-                  </a:lnTo>
-                  <a:lnTo>
-                    <a:pt x="644602" y="1634851"/>
-                  </a:lnTo>
-                  <a:lnTo>
-                    <a:pt x="572980" y="1633931"/>
-                  </a:lnTo>
-                  <a:lnTo>
-                    <a:pt x="501357" y="1633009"/>
-                  </a:lnTo>
-                  <a:lnTo>
-                    <a:pt x="429735" y="1632087"/>
-                  </a:lnTo>
-                  <a:lnTo>
-                    <a:pt x="358112" y="1631164"/>
-                  </a:lnTo>
-                  <a:lnTo>
-                    <a:pt x="286490" y="1630240"/>
-                  </a:lnTo>
-                  <a:lnTo>
-                    <a:pt x="214867" y="1629315"/>
-                  </a:lnTo>
-                  <a:lnTo>
-                    <a:pt x="143245" y="1628389"/>
-                  </a:lnTo>
-                  <a:lnTo>
-                    <a:pt x="71622" y="1627462"/>
-                  </a:lnTo>
-                  <a:lnTo>
-                    <a:pt x="0" y="1626534"/>
+                    <a:pt x="71622" y="56318"/>
+                  </a:lnTo>
+                  <a:lnTo>
+                    <a:pt x="143245" y="111369"/>
+                  </a:lnTo>
+                  <a:lnTo>
+                    <a:pt x="214867" y="165181"/>
+                  </a:lnTo>
+                  <a:lnTo>
+                    <a:pt x="286490" y="217783"/>
+                  </a:lnTo>
+                  <a:lnTo>
+                    <a:pt x="358112" y="269201"/>
+                  </a:lnTo>
+                  <a:lnTo>
+                    <a:pt x="429735" y="319463"/>
+                  </a:lnTo>
+                  <a:lnTo>
+                    <a:pt x="501357" y="368593"/>
+                  </a:lnTo>
+                  <a:lnTo>
+                    <a:pt x="572980" y="416619"/>
+                  </a:lnTo>
+                  <a:lnTo>
+                    <a:pt x="644602" y="463563"/>
+                  </a:lnTo>
+                  <a:lnTo>
+                    <a:pt x="716225" y="509452"/>
+                  </a:lnTo>
+                  <a:lnTo>
+                    <a:pt x="787847" y="554308"/>
+                  </a:lnTo>
+                  <a:lnTo>
+                    <a:pt x="859470" y="598155"/>
+                  </a:lnTo>
+                  <a:lnTo>
+                    <a:pt x="931092" y="641015"/>
+                  </a:lnTo>
+                  <a:lnTo>
+                    <a:pt x="1002715" y="682912"/>
+                  </a:lnTo>
+                  <a:lnTo>
+                    <a:pt x="1074337" y="723865"/>
+                  </a:lnTo>
+                  <a:lnTo>
+                    <a:pt x="1145960" y="763897"/>
+                  </a:lnTo>
+                  <a:lnTo>
+                    <a:pt x="1217582" y="803029"/>
+                  </a:lnTo>
+                  <a:lnTo>
+                    <a:pt x="1289205" y="841280"/>
+                  </a:lnTo>
+                  <a:lnTo>
+                    <a:pt x="1360827" y="878670"/>
+                  </a:lnTo>
+                  <a:lnTo>
+                    <a:pt x="1432450" y="915219"/>
+                  </a:lnTo>
+                  <a:lnTo>
+                    <a:pt x="1504073" y="950946"/>
+                  </a:lnTo>
+                  <a:lnTo>
+                    <a:pt x="1575695" y="985869"/>
+                  </a:lnTo>
+                  <a:lnTo>
+                    <a:pt x="1647318" y="1020006"/>
+                  </a:lnTo>
+                  <a:lnTo>
+                    <a:pt x="1718940" y="1053376"/>
+                  </a:lnTo>
+                  <a:lnTo>
+                    <a:pt x="1790563" y="1085994"/>
+                  </a:lnTo>
+                  <a:lnTo>
+                    <a:pt x="1862185" y="1117879"/>
+                  </a:lnTo>
+                  <a:lnTo>
+                    <a:pt x="1933808" y="1149046"/>
+                  </a:lnTo>
+                  <a:lnTo>
+                    <a:pt x="2005430" y="1179512"/>
+                  </a:lnTo>
+                  <a:lnTo>
+                    <a:pt x="2077053" y="1209293"/>
+                  </a:lnTo>
+                  <a:lnTo>
+                    <a:pt x="2148675" y="1238403"/>
+                  </a:lnTo>
+                  <a:lnTo>
+                    <a:pt x="2220298" y="1266859"/>
+                  </a:lnTo>
+                  <a:lnTo>
+                    <a:pt x="2291920" y="1294675"/>
+                  </a:lnTo>
+                  <a:lnTo>
+                    <a:pt x="2363543" y="1321864"/>
+                  </a:lnTo>
+                  <a:lnTo>
+                    <a:pt x="2435165" y="1348442"/>
+                  </a:lnTo>
+                  <a:lnTo>
+                    <a:pt x="2506788" y="1374422"/>
+                  </a:lnTo>
+                  <a:lnTo>
+                    <a:pt x="2578410" y="1399817"/>
+                  </a:lnTo>
+                  <a:lnTo>
+                    <a:pt x="2650033" y="1424641"/>
+                  </a:lnTo>
+                  <a:lnTo>
+                    <a:pt x="2721655" y="1448907"/>
+                  </a:lnTo>
+                  <a:lnTo>
+                    <a:pt x="2793278" y="1472626"/>
+                  </a:lnTo>
+                  <a:lnTo>
+                    <a:pt x="2864901" y="1495812"/>
+                  </a:lnTo>
+                  <a:lnTo>
+                    <a:pt x="2936523" y="1518477"/>
+                  </a:lnTo>
+                  <a:lnTo>
+                    <a:pt x="3008146" y="1540631"/>
+                  </a:lnTo>
+                  <a:lnTo>
+                    <a:pt x="3079768" y="1562287"/>
+                  </a:lnTo>
+                  <a:lnTo>
+                    <a:pt x="3151391" y="1583456"/>
+                  </a:lnTo>
+                  <a:lnTo>
+                    <a:pt x="3223013" y="1604148"/>
+                  </a:lnTo>
+                  <a:lnTo>
+                    <a:pt x="3294636" y="1624375"/>
+                  </a:lnTo>
+                  <a:lnTo>
+                    <a:pt x="3366258" y="1644147"/>
+                  </a:lnTo>
+                  <a:lnTo>
+                    <a:pt x="3437881" y="1663473"/>
+                  </a:lnTo>
+                  <a:lnTo>
+                    <a:pt x="3509503" y="1674085"/>
+                  </a:lnTo>
+                  <a:lnTo>
+                    <a:pt x="3581126" y="1674905"/>
+                  </a:lnTo>
+                  <a:lnTo>
+                    <a:pt x="3652748" y="1675725"/>
+                  </a:lnTo>
+                  <a:lnTo>
+                    <a:pt x="3724371" y="1676544"/>
+                  </a:lnTo>
+                  <a:lnTo>
+                    <a:pt x="3795993" y="1677363"/>
+                  </a:lnTo>
+                  <a:lnTo>
+                    <a:pt x="3867616" y="1678180"/>
+                  </a:lnTo>
+                  <a:lnTo>
+                    <a:pt x="3939238" y="1678997"/>
+                  </a:lnTo>
+                  <a:lnTo>
+                    <a:pt x="4010861" y="1679812"/>
+                  </a:lnTo>
+                  <a:lnTo>
+                    <a:pt x="4082483" y="1680627"/>
+                  </a:lnTo>
+                  <a:lnTo>
+                    <a:pt x="4154106" y="1681442"/>
+                  </a:lnTo>
+                  <a:lnTo>
+                    <a:pt x="4225729" y="1682255"/>
+                  </a:lnTo>
+                  <a:lnTo>
+                    <a:pt x="4297351" y="1683068"/>
+                  </a:lnTo>
+                  <a:lnTo>
+                    <a:pt x="4368974" y="1683879"/>
+                  </a:lnTo>
+                  <a:lnTo>
+                    <a:pt x="4440596" y="1684690"/>
+                  </a:lnTo>
+                  <a:lnTo>
+                    <a:pt x="4512219" y="1685501"/>
+                  </a:lnTo>
+                  <a:lnTo>
+                    <a:pt x="4583841" y="1686310"/>
+                  </a:lnTo>
+                  <a:lnTo>
+                    <a:pt x="4655464" y="1687119"/>
+                  </a:lnTo>
+                  <a:lnTo>
+                    <a:pt x="4727086" y="1687926"/>
+                  </a:lnTo>
+                  <a:lnTo>
+                    <a:pt x="4798709" y="1688733"/>
+                  </a:lnTo>
+                  <a:lnTo>
+                    <a:pt x="4870331" y="1689540"/>
+                  </a:lnTo>
+                  <a:lnTo>
+                    <a:pt x="4941954" y="1690345"/>
+                  </a:lnTo>
+                  <a:lnTo>
+                    <a:pt x="5013576" y="1691149"/>
+                  </a:lnTo>
+                  <a:lnTo>
+                    <a:pt x="5085199" y="1691953"/>
+                  </a:lnTo>
+                  <a:lnTo>
+                    <a:pt x="5156821" y="1692756"/>
+                  </a:lnTo>
+                  <a:lnTo>
+                    <a:pt x="5228444" y="1693558"/>
+                  </a:lnTo>
+                  <a:lnTo>
+                    <a:pt x="5300066" y="1694360"/>
+                  </a:lnTo>
+                  <a:lnTo>
+                    <a:pt x="5371689" y="1695160"/>
+                  </a:lnTo>
+                  <a:lnTo>
+                    <a:pt x="5443311" y="1695960"/>
+                  </a:lnTo>
+                  <a:lnTo>
+                    <a:pt x="5514934" y="1696759"/>
+                  </a:lnTo>
+                  <a:lnTo>
+                    <a:pt x="5586557" y="1697558"/>
+                  </a:lnTo>
+                  <a:lnTo>
+                    <a:pt x="5658179" y="1698355"/>
+                  </a:lnTo>
+                  <a:lnTo>
+                    <a:pt x="5729802" y="1699152"/>
+                  </a:lnTo>
+                  <a:lnTo>
+                    <a:pt x="5801424" y="1699948"/>
+                  </a:lnTo>
+                  <a:lnTo>
+                    <a:pt x="5873047" y="1700743"/>
+                  </a:lnTo>
+                  <a:lnTo>
+                    <a:pt x="5944669" y="1701537"/>
+                  </a:lnTo>
+                  <a:lnTo>
+                    <a:pt x="6016292" y="1702330"/>
+                  </a:lnTo>
+                  <a:lnTo>
+                    <a:pt x="6087914" y="1703123"/>
+                  </a:lnTo>
+                  <a:lnTo>
+                    <a:pt x="6159537" y="1703915"/>
+                  </a:lnTo>
+                  <a:lnTo>
+                    <a:pt x="6231159" y="1704706"/>
+                  </a:lnTo>
+                  <a:lnTo>
+                    <a:pt x="6302782" y="1705497"/>
+                  </a:lnTo>
+                  <a:lnTo>
+                    <a:pt x="6374404" y="1706286"/>
+                  </a:lnTo>
+                  <a:lnTo>
+                    <a:pt x="6446027" y="1707075"/>
+                  </a:lnTo>
+                  <a:lnTo>
+                    <a:pt x="6517649" y="1707863"/>
+                  </a:lnTo>
+                  <a:lnTo>
+                    <a:pt x="6589272" y="1708650"/>
+                  </a:lnTo>
+                  <a:lnTo>
+                    <a:pt x="6660894" y="1709437"/>
+                  </a:lnTo>
+                  <a:lnTo>
+                    <a:pt x="6732517" y="1710222"/>
+                  </a:lnTo>
+                  <a:lnTo>
+                    <a:pt x="6804139" y="1711007"/>
+                  </a:lnTo>
+                  <a:lnTo>
+                    <a:pt x="6875762" y="1711791"/>
+                  </a:lnTo>
+                  <a:lnTo>
+                    <a:pt x="6947385" y="1712575"/>
+                  </a:lnTo>
+                  <a:lnTo>
+                    <a:pt x="7019007" y="1713357"/>
+                  </a:lnTo>
+                  <a:lnTo>
+                    <a:pt x="7090630" y="1714139"/>
+                  </a:lnTo>
+                  <a:lnTo>
+                    <a:pt x="7090630" y="2240079"/>
+                  </a:lnTo>
+                  <a:lnTo>
+                    <a:pt x="7019007" y="2234023"/>
+                  </a:lnTo>
+                  <a:lnTo>
+                    <a:pt x="6947385" y="2227828"/>
+                  </a:lnTo>
+                  <a:lnTo>
+                    <a:pt x="6875762" y="2221491"/>
+                  </a:lnTo>
+                  <a:lnTo>
+                    <a:pt x="6804139" y="2215008"/>
+                  </a:lnTo>
+                  <a:lnTo>
+                    <a:pt x="6732517" y="2208375"/>
+                  </a:lnTo>
+                  <a:lnTo>
+                    <a:pt x="6660894" y="2201590"/>
+                  </a:lnTo>
+                  <a:lnTo>
+                    <a:pt x="6589272" y="2194649"/>
+                  </a:lnTo>
+                  <a:lnTo>
+                    <a:pt x="6517649" y="2187548"/>
+                  </a:lnTo>
+                  <a:lnTo>
+                    <a:pt x="6446027" y="2180283"/>
+                  </a:lnTo>
+                  <a:lnTo>
+                    <a:pt x="6374404" y="2172851"/>
+                  </a:lnTo>
+                  <a:lnTo>
+                    <a:pt x="6302782" y="2165248"/>
+                  </a:lnTo>
+                  <a:lnTo>
+                    <a:pt x="6231159" y="2157471"/>
+                  </a:lnTo>
+                  <a:lnTo>
+                    <a:pt x="6159537" y="2149514"/>
+                  </a:lnTo>
+                  <a:lnTo>
+                    <a:pt x="6087914" y="2141374"/>
+                  </a:lnTo>
+                  <a:lnTo>
+                    <a:pt x="6016292" y="2133047"/>
+                  </a:lnTo>
+                  <a:lnTo>
+                    <a:pt x="5944669" y="2124528"/>
+                  </a:lnTo>
+                  <a:lnTo>
+                    <a:pt x="5873047" y="2115813"/>
+                  </a:lnTo>
+                  <a:lnTo>
+                    <a:pt x="5801424" y="2106897"/>
+                  </a:lnTo>
+                  <a:lnTo>
+                    <a:pt x="5729802" y="2097776"/>
+                  </a:lnTo>
+                  <a:lnTo>
+                    <a:pt x="5658179" y="2088445"/>
+                  </a:lnTo>
+                  <a:lnTo>
+                    <a:pt x="5586557" y="2078900"/>
+                  </a:lnTo>
+                  <a:lnTo>
+                    <a:pt x="5514934" y="2069135"/>
+                  </a:lnTo>
+                  <a:lnTo>
+                    <a:pt x="5443311" y="2059145"/>
+                  </a:lnTo>
+                  <a:lnTo>
+                    <a:pt x="5371689" y="2048925"/>
+                  </a:lnTo>
+                  <a:lnTo>
+                    <a:pt x="5300066" y="2038470"/>
+                  </a:lnTo>
+                  <a:lnTo>
+                    <a:pt x="5228444" y="2027774"/>
+                  </a:lnTo>
+                  <a:lnTo>
+                    <a:pt x="5156821" y="2016832"/>
+                  </a:lnTo>
+                  <a:lnTo>
+                    <a:pt x="5085199" y="2005638"/>
+                  </a:lnTo>
+                  <a:lnTo>
+                    <a:pt x="5013576" y="1994186"/>
+                  </a:lnTo>
+                  <a:lnTo>
+                    <a:pt x="4941954" y="1982471"/>
+                  </a:lnTo>
+                  <a:lnTo>
+                    <a:pt x="4870331" y="1970487"/>
+                  </a:lnTo>
+                  <a:lnTo>
+                    <a:pt x="4798709" y="1958226"/>
+                  </a:lnTo>
+                  <a:lnTo>
+                    <a:pt x="4727086" y="1945683"/>
+                  </a:lnTo>
+                  <a:lnTo>
+                    <a:pt x="4655464" y="1932852"/>
+                  </a:lnTo>
+                  <a:lnTo>
+                    <a:pt x="4583841" y="1919725"/>
+                  </a:lnTo>
+                  <a:lnTo>
+                    <a:pt x="4512219" y="1906296"/>
+                  </a:lnTo>
+                  <a:lnTo>
+                    <a:pt x="4440596" y="1892558"/>
+                  </a:lnTo>
+                  <a:lnTo>
+                    <a:pt x="4368974" y="1878504"/>
+                  </a:lnTo>
+                  <a:lnTo>
+                    <a:pt x="4297351" y="1864127"/>
+                  </a:lnTo>
+                  <a:lnTo>
+                    <a:pt x="4225729" y="1849418"/>
+                  </a:lnTo>
+                  <a:lnTo>
+                    <a:pt x="4154106" y="1834371"/>
+                  </a:lnTo>
+                  <a:lnTo>
+                    <a:pt x="4082483" y="1818977"/>
+                  </a:lnTo>
+                  <a:lnTo>
+                    <a:pt x="4010861" y="1803230"/>
+                  </a:lnTo>
+                  <a:lnTo>
+                    <a:pt x="3939238" y="1787119"/>
+                  </a:lnTo>
+                  <a:lnTo>
+                    <a:pt x="3867616" y="1770638"/>
+                  </a:lnTo>
+                  <a:lnTo>
+                    <a:pt x="3795993" y="1753778"/>
+                  </a:lnTo>
+                  <a:lnTo>
+                    <a:pt x="3724371" y="1736530"/>
+                  </a:lnTo>
+                  <a:lnTo>
+                    <a:pt x="3652748" y="1718884"/>
+                  </a:lnTo>
+                  <a:lnTo>
+                    <a:pt x="3581126" y="1700833"/>
+                  </a:lnTo>
+                  <a:lnTo>
+                    <a:pt x="3509503" y="1682366"/>
+                  </a:lnTo>
+                  <a:lnTo>
+                    <a:pt x="3437881" y="1673263"/>
+                  </a:lnTo>
+                  <a:lnTo>
+                    <a:pt x="3366258" y="1672441"/>
+                  </a:lnTo>
+                  <a:lnTo>
+                    <a:pt x="3294636" y="1671618"/>
+                  </a:lnTo>
+                  <a:lnTo>
+                    <a:pt x="3223013" y="1670794"/>
+                  </a:lnTo>
+                  <a:lnTo>
+                    <a:pt x="3151391" y="1669969"/>
+                  </a:lnTo>
+                  <a:lnTo>
+                    <a:pt x="3079768" y="1669144"/>
+                  </a:lnTo>
+                  <a:lnTo>
+                    <a:pt x="3008146" y="1668317"/>
+                  </a:lnTo>
+                  <a:lnTo>
+                    <a:pt x="2936523" y="1667490"/>
+                  </a:lnTo>
+                  <a:lnTo>
+                    <a:pt x="2864901" y="1666662"/>
+                  </a:lnTo>
+                  <a:lnTo>
+                    <a:pt x="2793278" y="1665833"/>
+                  </a:lnTo>
+                  <a:lnTo>
+                    <a:pt x="2721655" y="1665003"/>
+                  </a:lnTo>
+                  <a:lnTo>
+                    <a:pt x="2650033" y="1664173"/>
+                  </a:lnTo>
+                  <a:lnTo>
+                    <a:pt x="2578410" y="1663342"/>
+                  </a:lnTo>
+                  <a:lnTo>
+                    <a:pt x="2506788" y="1662509"/>
+                  </a:lnTo>
+                  <a:lnTo>
+                    <a:pt x="2435165" y="1661676"/>
+                  </a:lnTo>
+                  <a:lnTo>
+                    <a:pt x="2363543" y="1660843"/>
+                  </a:lnTo>
+                  <a:lnTo>
+                    <a:pt x="2291920" y="1660008"/>
+                  </a:lnTo>
+                  <a:lnTo>
+                    <a:pt x="2220298" y="1659173"/>
+                  </a:lnTo>
+                  <a:lnTo>
+                    <a:pt x="2148675" y="1658336"/>
+                  </a:lnTo>
+                  <a:lnTo>
+                    <a:pt x="2077053" y="1657499"/>
+                  </a:lnTo>
+                  <a:lnTo>
+                    <a:pt x="2005430" y="1656661"/>
+                  </a:lnTo>
+                  <a:lnTo>
+                    <a:pt x="1933808" y="1655823"/>
+                  </a:lnTo>
+                  <a:lnTo>
+                    <a:pt x="1862185" y="1654983"/>
+                  </a:lnTo>
+                  <a:lnTo>
+                    <a:pt x="1790563" y="1654143"/>
+                  </a:lnTo>
+                  <a:lnTo>
+                    <a:pt x="1718940" y="1653301"/>
+                  </a:lnTo>
+                  <a:lnTo>
+                    <a:pt x="1647318" y="1652459"/>
+                  </a:lnTo>
+                  <a:lnTo>
+                    <a:pt x="1575695" y="1651616"/>
+                  </a:lnTo>
+                  <a:lnTo>
+                    <a:pt x="1504073" y="1650773"/>
+                  </a:lnTo>
+                  <a:lnTo>
+                    <a:pt x="1432450" y="1649928"/>
+                  </a:lnTo>
+                  <a:lnTo>
+                    <a:pt x="1360827" y="1649083"/>
+                  </a:lnTo>
+                  <a:lnTo>
+                    <a:pt x="1289205" y="1648236"/>
+                  </a:lnTo>
+                  <a:lnTo>
+                    <a:pt x="1217582" y="1647389"/>
+                  </a:lnTo>
+                  <a:lnTo>
+                    <a:pt x="1145960" y="1646541"/>
+                  </a:lnTo>
+                  <a:lnTo>
+                    <a:pt x="1074337" y="1645692"/>
+                  </a:lnTo>
+                  <a:lnTo>
+                    <a:pt x="1002715" y="1644843"/>
+                  </a:lnTo>
+                  <a:lnTo>
+                    <a:pt x="931092" y="1643992"/>
+                  </a:lnTo>
+                  <a:lnTo>
+                    <a:pt x="859470" y="1643141"/>
+                  </a:lnTo>
+                  <a:lnTo>
+                    <a:pt x="787847" y="1642289"/>
+                  </a:lnTo>
+                  <a:lnTo>
+                    <a:pt x="716225" y="1641436"/>
+                  </a:lnTo>
+                  <a:lnTo>
+                    <a:pt x="644602" y="1640582"/>
+                  </a:lnTo>
+                  <a:lnTo>
+                    <a:pt x="572980" y="1639727"/>
+                  </a:lnTo>
+                  <a:lnTo>
+                    <a:pt x="501357" y="1638872"/>
+                  </a:lnTo>
+                  <a:lnTo>
+                    <a:pt x="429735" y="1638015"/>
+                  </a:lnTo>
+                  <a:lnTo>
+                    <a:pt x="358112" y="1637158"/>
+                  </a:lnTo>
+                  <a:lnTo>
+                    <a:pt x="286490" y="1636300"/>
+                  </a:lnTo>
+                  <a:lnTo>
+                    <a:pt x="214867" y="1635441"/>
+                  </a:lnTo>
+                  <a:lnTo>
+                    <a:pt x="143245" y="1634581"/>
+                  </a:lnTo>
+                  <a:lnTo>
+                    <a:pt x="71622" y="1633721"/>
+                  </a:lnTo>
+                  <a:lnTo>
+                    <a:pt x="0" y="1632859"/>
                   </a:lnTo>
                   <a:close/>
                 </a:path>
@@ -3676,312 +3676,312 @@
           </p:nvSpPr>
           <p:spPr>
             <a:xfrm>
-              <a:off x="1172049" y="3057521"/>
-              <a:ext cx="7090630" cy="1713780"/>
+              <a:off x="1172049" y="3054079"/>
+              <a:ext cx="7090630" cy="1714139"/>
             </a:xfrm>
             <a:custGeom>
               <a:avLst/>
               <a:pathLst>
-                <a:path w="7090630" h="1713780">
+                <a:path w="7090630" h="1714139">
                   <a:moveTo>
                     <a:pt x="0" y="0"/>
                   </a:moveTo>
                   <a:lnTo>
-                    <a:pt x="71622" y="56423"/>
-                  </a:lnTo>
-                  <a:lnTo>
-                    <a:pt x="143245" y="111574"/>
-                  </a:lnTo>
-                  <a:lnTo>
-                    <a:pt x="214867" y="165479"/>
-                  </a:lnTo>
-                  <a:lnTo>
-                    <a:pt x="286490" y="218168"/>
-                  </a:lnTo>
-                  <a:lnTo>
-                    <a:pt x="358112" y="269667"/>
-                  </a:lnTo>
-                  <a:lnTo>
-                    <a:pt x="429735" y="320004"/>
-                  </a:lnTo>
-                  <a:lnTo>
-                    <a:pt x="501357" y="369205"/>
-                  </a:lnTo>
-                  <a:lnTo>
-                    <a:pt x="572980" y="417295"/>
-                  </a:lnTo>
-                  <a:lnTo>
-                    <a:pt x="644602" y="464300"/>
-                  </a:lnTo>
-                  <a:lnTo>
-                    <a:pt x="716225" y="510244"/>
-                  </a:lnTo>
-                  <a:lnTo>
-                    <a:pt x="787847" y="555150"/>
-                  </a:lnTo>
-                  <a:lnTo>
-                    <a:pt x="859470" y="599043"/>
-                  </a:lnTo>
-                  <a:lnTo>
-                    <a:pt x="931092" y="641945"/>
-                  </a:lnTo>
-                  <a:lnTo>
-                    <a:pt x="1002715" y="683879"/>
-                  </a:lnTo>
-                  <a:lnTo>
-                    <a:pt x="1074337" y="724867"/>
-                  </a:lnTo>
-                  <a:lnTo>
-                    <a:pt x="1145960" y="764929"/>
-                  </a:lnTo>
-                  <a:lnTo>
-                    <a:pt x="1217582" y="804087"/>
-                  </a:lnTo>
-                  <a:lnTo>
-                    <a:pt x="1289205" y="842361"/>
-                  </a:lnTo>
-                  <a:lnTo>
-                    <a:pt x="1360827" y="879771"/>
-                  </a:lnTo>
-                  <a:lnTo>
-                    <a:pt x="1432450" y="916337"/>
-                  </a:lnTo>
-                  <a:lnTo>
-                    <a:pt x="1504073" y="952077"/>
-                  </a:lnTo>
-                  <a:lnTo>
-                    <a:pt x="1575695" y="987011"/>
-                  </a:lnTo>
-                  <a:lnTo>
-                    <a:pt x="1647318" y="1021156"/>
-                  </a:lnTo>
-                  <a:lnTo>
-                    <a:pt x="1718940" y="1054530"/>
-                  </a:lnTo>
-                  <a:lnTo>
-                    <a:pt x="1790563" y="1087151"/>
-                  </a:lnTo>
-                  <a:lnTo>
-                    <a:pt x="1862185" y="1119036"/>
-                  </a:lnTo>
-                  <a:lnTo>
-                    <a:pt x="1933808" y="1150201"/>
-                  </a:lnTo>
-                  <a:lnTo>
-                    <a:pt x="2005430" y="1180662"/>
-                  </a:lnTo>
-                  <a:lnTo>
-                    <a:pt x="2077053" y="1210436"/>
-                  </a:lnTo>
-                  <a:lnTo>
-                    <a:pt x="2148675" y="1239538"/>
-                  </a:lnTo>
-                  <a:lnTo>
-                    <a:pt x="2220298" y="1267983"/>
-                  </a:lnTo>
-                  <a:lnTo>
-                    <a:pt x="2291920" y="1295786"/>
-                  </a:lnTo>
-                  <a:lnTo>
-                    <a:pt x="2363543" y="1322961"/>
-                  </a:lnTo>
-                  <a:lnTo>
-                    <a:pt x="2435165" y="1349523"/>
-                  </a:lnTo>
-                  <a:lnTo>
-                    <a:pt x="2506788" y="1375486"/>
-                  </a:lnTo>
-                  <a:lnTo>
-                    <a:pt x="2578410" y="1400862"/>
-                  </a:lnTo>
-                  <a:lnTo>
-                    <a:pt x="2650033" y="1425666"/>
-                  </a:lnTo>
-                  <a:lnTo>
-                    <a:pt x="2721655" y="1449910"/>
-                  </a:lnTo>
-                  <a:lnTo>
-                    <a:pt x="2793278" y="1473606"/>
-                  </a:lnTo>
-                  <a:lnTo>
-                    <a:pt x="2864901" y="1496768"/>
-                  </a:lnTo>
-                  <a:lnTo>
-                    <a:pt x="2936523" y="1519407"/>
-                  </a:lnTo>
-                  <a:lnTo>
-                    <a:pt x="3008146" y="1541534"/>
-                  </a:lnTo>
-                  <a:lnTo>
-                    <a:pt x="3079768" y="1563163"/>
-                  </a:lnTo>
-                  <a:lnTo>
-                    <a:pt x="3151391" y="1584303"/>
-                  </a:lnTo>
-                  <a:lnTo>
-                    <a:pt x="3223013" y="1604966"/>
-                  </a:lnTo>
-                  <a:lnTo>
-                    <a:pt x="3294636" y="1625163"/>
-                  </a:lnTo>
-                  <a:lnTo>
-                    <a:pt x="3366258" y="1644903"/>
-                  </a:lnTo>
-                  <a:lnTo>
-                    <a:pt x="3437881" y="1664198"/>
-                  </a:lnTo>
-                  <a:lnTo>
-                    <a:pt x="3509503" y="1670865"/>
-                  </a:lnTo>
-                  <a:lnTo>
-                    <a:pt x="3581126" y="1671745"/>
-                  </a:lnTo>
-                  <a:lnTo>
-                    <a:pt x="3652748" y="1672625"/>
-                  </a:lnTo>
-                  <a:lnTo>
-                    <a:pt x="3724371" y="1673504"/>
-                  </a:lnTo>
-                  <a:lnTo>
-                    <a:pt x="3795993" y="1674382"/>
-                  </a:lnTo>
-                  <a:lnTo>
-                    <a:pt x="3867616" y="1675260"/>
-                  </a:lnTo>
-                  <a:lnTo>
-                    <a:pt x="3939238" y="1676136"/>
-                  </a:lnTo>
-                  <a:lnTo>
-                    <a:pt x="4010861" y="1677011"/>
-                  </a:lnTo>
-                  <a:lnTo>
-                    <a:pt x="4082483" y="1677885"/>
-                  </a:lnTo>
-                  <a:lnTo>
-                    <a:pt x="4154106" y="1678759"/>
-                  </a:lnTo>
-                  <a:lnTo>
-                    <a:pt x="4225729" y="1679631"/>
-                  </a:lnTo>
-                  <a:lnTo>
-                    <a:pt x="4297351" y="1680503"/>
-                  </a:lnTo>
-                  <a:lnTo>
-                    <a:pt x="4368974" y="1681373"/>
-                  </a:lnTo>
-                  <a:lnTo>
-                    <a:pt x="4440596" y="1682243"/>
-                  </a:lnTo>
-                  <a:lnTo>
-                    <a:pt x="4512219" y="1683112"/>
-                  </a:lnTo>
-                  <a:lnTo>
-                    <a:pt x="4583841" y="1683980"/>
-                  </a:lnTo>
-                  <a:lnTo>
-                    <a:pt x="4655464" y="1684847"/>
-                  </a:lnTo>
-                  <a:lnTo>
-                    <a:pt x="4727086" y="1685713"/>
-                  </a:lnTo>
-                  <a:lnTo>
-                    <a:pt x="4798709" y="1686578"/>
-                  </a:lnTo>
-                  <a:lnTo>
-                    <a:pt x="4870331" y="1687442"/>
-                  </a:lnTo>
-                  <a:lnTo>
-                    <a:pt x="4941954" y="1688305"/>
-                  </a:lnTo>
-                  <a:lnTo>
-                    <a:pt x="5013576" y="1689167"/>
-                  </a:lnTo>
-                  <a:lnTo>
-                    <a:pt x="5085199" y="1690029"/>
-                  </a:lnTo>
-                  <a:lnTo>
-                    <a:pt x="5156821" y="1690889"/>
-                  </a:lnTo>
-                  <a:lnTo>
-                    <a:pt x="5228444" y="1691749"/>
-                  </a:lnTo>
-                  <a:lnTo>
-                    <a:pt x="5300066" y="1692608"/>
-                  </a:lnTo>
-                  <a:lnTo>
-                    <a:pt x="5371689" y="1693465"/>
-                  </a:lnTo>
-                  <a:lnTo>
-                    <a:pt x="5443311" y="1694322"/>
-                  </a:lnTo>
-                  <a:lnTo>
-                    <a:pt x="5514934" y="1695178"/>
-                  </a:lnTo>
-                  <a:lnTo>
-                    <a:pt x="5586557" y="1696033"/>
-                  </a:lnTo>
-                  <a:lnTo>
-                    <a:pt x="5658179" y="1696887"/>
-                  </a:lnTo>
-                  <a:lnTo>
-                    <a:pt x="5729802" y="1697741"/>
-                  </a:lnTo>
-                  <a:lnTo>
-                    <a:pt x="5801424" y="1698593"/>
-                  </a:lnTo>
-                  <a:lnTo>
-                    <a:pt x="5873047" y="1699444"/>
-                  </a:lnTo>
-                  <a:lnTo>
-                    <a:pt x="5944669" y="1700295"/>
-                  </a:lnTo>
-                  <a:lnTo>
-                    <a:pt x="6016292" y="1701144"/>
-                  </a:lnTo>
-                  <a:lnTo>
-                    <a:pt x="6087914" y="1701993"/>
-                  </a:lnTo>
-                  <a:lnTo>
-                    <a:pt x="6159537" y="1702841"/>
-                  </a:lnTo>
-                  <a:lnTo>
-                    <a:pt x="6231159" y="1703688"/>
-                  </a:lnTo>
-                  <a:lnTo>
-                    <a:pt x="6302782" y="1704534"/>
-                  </a:lnTo>
-                  <a:lnTo>
-                    <a:pt x="6374404" y="1705379"/>
-                  </a:lnTo>
-                  <a:lnTo>
-                    <a:pt x="6446027" y="1706223"/>
-                  </a:lnTo>
-                  <a:lnTo>
-                    <a:pt x="6517649" y="1707066"/>
-                  </a:lnTo>
-                  <a:lnTo>
-                    <a:pt x="6589272" y="1707909"/>
-                  </a:lnTo>
-                  <a:lnTo>
-                    <a:pt x="6660894" y="1708750"/>
-                  </a:lnTo>
-                  <a:lnTo>
-                    <a:pt x="6732517" y="1709591"/>
-                  </a:lnTo>
-                  <a:lnTo>
-                    <a:pt x="6804139" y="1710430"/>
-                  </a:lnTo>
-                  <a:lnTo>
-                    <a:pt x="6875762" y="1711269"/>
-                  </a:lnTo>
-                  <a:lnTo>
-                    <a:pt x="6947385" y="1712107"/>
-                  </a:lnTo>
-                  <a:lnTo>
-                    <a:pt x="7019007" y="1712944"/>
-                  </a:lnTo>
-                  <a:lnTo>
-                    <a:pt x="7090630" y="1713780"/>
+                    <a:pt x="71622" y="56318"/>
+                  </a:lnTo>
+                  <a:lnTo>
+                    <a:pt x="143245" y="111369"/>
+                  </a:lnTo>
+                  <a:lnTo>
+                    <a:pt x="214867" y="165181"/>
+                  </a:lnTo>
+                  <a:lnTo>
+                    <a:pt x="286490" y="217783"/>
+                  </a:lnTo>
+                  <a:lnTo>
+                    <a:pt x="358112" y="269201"/>
+                  </a:lnTo>
+                  <a:lnTo>
+                    <a:pt x="429735" y="319463"/>
+                  </a:lnTo>
+                  <a:lnTo>
+                    <a:pt x="501357" y="368593"/>
+                  </a:lnTo>
+                  <a:lnTo>
+                    <a:pt x="572980" y="416619"/>
+                  </a:lnTo>
+                  <a:lnTo>
+                    <a:pt x="644602" y="463563"/>
+                  </a:lnTo>
+                  <a:lnTo>
+                    <a:pt x="716225" y="509452"/>
+                  </a:lnTo>
+                  <a:lnTo>
+                    <a:pt x="787847" y="554308"/>
+                  </a:lnTo>
+                  <a:lnTo>
+                    <a:pt x="859470" y="598155"/>
+                  </a:lnTo>
+                  <a:lnTo>
+                    <a:pt x="931092" y="641015"/>
+                  </a:lnTo>
+                  <a:lnTo>
+                    <a:pt x="1002715" y="682912"/>
+                  </a:lnTo>
+                  <a:lnTo>
+                    <a:pt x="1074337" y="723865"/>
+                  </a:lnTo>
+                  <a:lnTo>
+                    <a:pt x="1145960" y="763897"/>
+                  </a:lnTo>
+                  <a:lnTo>
+                    <a:pt x="1217582" y="803029"/>
+                  </a:lnTo>
+                  <a:lnTo>
+                    <a:pt x="1289205" y="841280"/>
+                  </a:lnTo>
+                  <a:lnTo>
+                    <a:pt x="1360827" y="878670"/>
+                  </a:lnTo>
+                  <a:lnTo>
+                    <a:pt x="1432450" y="915219"/>
+                  </a:lnTo>
+                  <a:lnTo>
+                    <a:pt x="1504073" y="950946"/>
+                  </a:lnTo>
+                  <a:lnTo>
+                    <a:pt x="1575695" y="985869"/>
+                  </a:lnTo>
+                  <a:lnTo>
+                    <a:pt x="1647318" y="1020006"/>
+                  </a:lnTo>
+                  <a:lnTo>
+                    <a:pt x="1718940" y="1053376"/>
+                  </a:lnTo>
+                  <a:lnTo>
+                    <a:pt x="1790563" y="1085994"/>
+                  </a:lnTo>
+                  <a:lnTo>
+                    <a:pt x="1862185" y="1117879"/>
+                  </a:lnTo>
+                  <a:lnTo>
+                    <a:pt x="1933808" y="1149046"/>
+                  </a:lnTo>
+                  <a:lnTo>
+                    <a:pt x="2005430" y="1179512"/>
+                  </a:lnTo>
+                  <a:lnTo>
+                    <a:pt x="2077053" y="1209293"/>
+                  </a:lnTo>
+                  <a:lnTo>
+                    <a:pt x="2148675" y="1238403"/>
+                  </a:lnTo>
+                  <a:lnTo>
+                    <a:pt x="2220298" y="1266859"/>
+                  </a:lnTo>
+                  <a:lnTo>
+                    <a:pt x="2291920" y="1294675"/>
+                  </a:lnTo>
+                  <a:lnTo>
+                    <a:pt x="2363543" y="1321864"/>
+                  </a:lnTo>
+                  <a:lnTo>
+                    <a:pt x="2435165" y="1348442"/>
+                  </a:lnTo>
+                  <a:lnTo>
+                    <a:pt x="2506788" y="1374422"/>
+                  </a:lnTo>
+                  <a:lnTo>
+                    <a:pt x="2578410" y="1399817"/>
+                  </a:lnTo>
+                  <a:lnTo>
+                    <a:pt x="2650033" y="1424641"/>
+                  </a:lnTo>
+                  <a:lnTo>
+                    <a:pt x="2721655" y="1448907"/>
+                  </a:lnTo>
+                  <a:lnTo>
+                    <a:pt x="2793278" y="1472626"/>
+                  </a:lnTo>
+                  <a:lnTo>
+                    <a:pt x="2864901" y="1495812"/>
+                  </a:lnTo>
+                  <a:lnTo>
+                    <a:pt x="2936523" y="1518477"/>
+                  </a:lnTo>
+                  <a:lnTo>
+                    <a:pt x="3008146" y="1540631"/>
+                  </a:lnTo>
+                  <a:lnTo>
+                    <a:pt x="3079768" y="1562287"/>
+                  </a:lnTo>
+                  <a:lnTo>
+                    <a:pt x="3151391" y="1583456"/>
+                  </a:lnTo>
+                  <a:lnTo>
+                    <a:pt x="3223013" y="1604148"/>
+                  </a:lnTo>
+                  <a:lnTo>
+                    <a:pt x="3294636" y="1624375"/>
+                  </a:lnTo>
+                  <a:lnTo>
+                    <a:pt x="3366258" y="1644147"/>
+                  </a:lnTo>
+                  <a:lnTo>
+                    <a:pt x="3437881" y="1663473"/>
+                  </a:lnTo>
+                  <a:lnTo>
+                    <a:pt x="3509503" y="1674085"/>
+                  </a:lnTo>
+                  <a:lnTo>
+                    <a:pt x="3581126" y="1674905"/>
+                  </a:lnTo>
+                  <a:lnTo>
+                    <a:pt x="3652748" y="1675725"/>
+                  </a:lnTo>
+                  <a:lnTo>
+                    <a:pt x="3724371" y="1676544"/>
+                  </a:lnTo>
+                  <a:lnTo>
+                    <a:pt x="3795993" y="1677363"/>
+                  </a:lnTo>
+                  <a:lnTo>
+                    <a:pt x="3867616" y="1678180"/>
+                  </a:lnTo>
+                  <a:lnTo>
+                    <a:pt x="3939238" y="1678997"/>
+                  </a:lnTo>
+                  <a:lnTo>
+                    <a:pt x="4010861" y="1679812"/>
+                  </a:lnTo>
+                  <a:lnTo>
+                    <a:pt x="4082483" y="1680627"/>
+                  </a:lnTo>
+                  <a:lnTo>
+                    <a:pt x="4154106" y="1681442"/>
+                  </a:lnTo>
+                  <a:lnTo>
+                    <a:pt x="4225729" y="1682255"/>
+                  </a:lnTo>
+                  <a:lnTo>
+                    <a:pt x="4297351" y="1683068"/>
+                  </a:lnTo>
+                  <a:lnTo>
+                    <a:pt x="4368974" y="1683879"/>
+                  </a:lnTo>
+                  <a:lnTo>
+                    <a:pt x="4440596" y="1684690"/>
+                  </a:lnTo>
+                  <a:lnTo>
+                    <a:pt x="4512219" y="1685501"/>
+                  </a:lnTo>
+                  <a:lnTo>
+                    <a:pt x="4583841" y="1686310"/>
+                  </a:lnTo>
+                  <a:lnTo>
+                    <a:pt x="4655464" y="1687119"/>
+                  </a:lnTo>
+                  <a:lnTo>
+                    <a:pt x="4727086" y="1687926"/>
+                  </a:lnTo>
+                  <a:lnTo>
+                    <a:pt x="4798709" y="1688733"/>
+                  </a:lnTo>
+                  <a:lnTo>
+                    <a:pt x="4870331" y="1689540"/>
+                  </a:lnTo>
+                  <a:lnTo>
+                    <a:pt x="4941954" y="1690345"/>
+                  </a:lnTo>
+                  <a:lnTo>
+                    <a:pt x="5013576" y="1691149"/>
+                  </a:lnTo>
+                  <a:lnTo>
+                    <a:pt x="5085199" y="1691953"/>
+                  </a:lnTo>
+                  <a:lnTo>
+                    <a:pt x="5156821" y="1692756"/>
+                  </a:lnTo>
+                  <a:lnTo>
+                    <a:pt x="5228444" y="1693558"/>
+                  </a:lnTo>
+                  <a:lnTo>
+                    <a:pt x="5300066" y="1694360"/>
+                  </a:lnTo>
+                  <a:lnTo>
+                    <a:pt x="5371689" y="1695160"/>
+                  </a:lnTo>
+                  <a:lnTo>
+                    <a:pt x="5443311" y="1695960"/>
+                  </a:lnTo>
+                  <a:lnTo>
+                    <a:pt x="5514934" y="1696759"/>
+                  </a:lnTo>
+                  <a:lnTo>
+                    <a:pt x="5586557" y="1697558"/>
+                  </a:lnTo>
+                  <a:lnTo>
+                    <a:pt x="5658179" y="1698355"/>
+                  </a:lnTo>
+                  <a:lnTo>
+                    <a:pt x="5729802" y="1699152"/>
+                  </a:lnTo>
+                  <a:lnTo>
+                    <a:pt x="5801424" y="1699948"/>
+                  </a:lnTo>
+                  <a:lnTo>
+                    <a:pt x="5873047" y="1700743"/>
+                  </a:lnTo>
+                  <a:lnTo>
+                    <a:pt x="5944669" y="1701537"/>
+                  </a:lnTo>
+                  <a:lnTo>
+                    <a:pt x="6016292" y="1702330"/>
+                  </a:lnTo>
+                  <a:lnTo>
+                    <a:pt x="6087914" y="1703123"/>
+                  </a:lnTo>
+                  <a:lnTo>
+                    <a:pt x="6159537" y="1703915"/>
+                  </a:lnTo>
+                  <a:lnTo>
+                    <a:pt x="6231159" y="1704706"/>
+                  </a:lnTo>
+                  <a:lnTo>
+                    <a:pt x="6302782" y="1705497"/>
+                  </a:lnTo>
+                  <a:lnTo>
+                    <a:pt x="6374404" y="1706286"/>
+                  </a:lnTo>
+                  <a:lnTo>
+                    <a:pt x="6446027" y="1707075"/>
+                  </a:lnTo>
+                  <a:lnTo>
+                    <a:pt x="6517649" y="1707863"/>
+                  </a:lnTo>
+                  <a:lnTo>
+                    <a:pt x="6589272" y="1708650"/>
+                  </a:lnTo>
+                  <a:lnTo>
+                    <a:pt x="6660894" y="1709437"/>
+                  </a:lnTo>
+                  <a:lnTo>
+                    <a:pt x="6732517" y="1710222"/>
+                  </a:lnTo>
+                  <a:lnTo>
+                    <a:pt x="6804139" y="1711007"/>
+                  </a:lnTo>
+                  <a:lnTo>
+                    <a:pt x="6875762" y="1711791"/>
+                  </a:lnTo>
+                  <a:lnTo>
+                    <a:pt x="6947385" y="1712575"/>
+                  </a:lnTo>
+                  <a:lnTo>
+                    <a:pt x="7019007" y="1713357"/>
+                  </a:lnTo>
+                  <a:lnTo>
+                    <a:pt x="7090630" y="1714139"/>
                   </a:lnTo>
                 </a:path>
               </a:pathLst>
@@ -4001,309 +4001,309 @@
           </p:nvSpPr>
           <p:spPr>
             <a:xfrm>
-              <a:off x="1172049" y="4684056"/>
-              <a:ext cx="7090630" cy="612407"/>
+              <a:off x="1172049" y="4686939"/>
+              <a:ext cx="7090630" cy="607219"/>
             </a:xfrm>
             <a:custGeom>
               <a:avLst/>
               <a:pathLst>
-                <a:path w="7090630" h="612407">
+                <a:path w="7090630" h="607219">
                   <a:moveTo>
-                    <a:pt x="7090630" y="612407"/>
+                    <a:pt x="7090630" y="607219"/>
                   </a:moveTo>
                   <a:lnTo>
-                    <a:pt x="7019007" y="606384"/>
-                  </a:lnTo>
-                  <a:lnTo>
-                    <a:pt x="6947385" y="600223"/>
-                  </a:lnTo>
-                  <a:lnTo>
-                    <a:pt x="6875762" y="593919"/>
-                  </a:lnTo>
-                  <a:lnTo>
-                    <a:pt x="6804139" y="587469"/>
-                  </a:lnTo>
-                  <a:lnTo>
-                    <a:pt x="6732517" y="580871"/>
-                  </a:lnTo>
-                  <a:lnTo>
-                    <a:pt x="6660894" y="574121"/>
-                  </a:lnTo>
-                  <a:lnTo>
-                    <a:pt x="6589272" y="567214"/>
-                  </a:lnTo>
-                  <a:lnTo>
-                    <a:pt x="6517649" y="560148"/>
-                  </a:lnTo>
-                  <a:lnTo>
-                    <a:pt x="6446027" y="552919"/>
-                  </a:lnTo>
-                  <a:lnTo>
-                    <a:pt x="6374404" y="545522"/>
-                  </a:lnTo>
-                  <a:lnTo>
-                    <a:pt x="6302782" y="537956"/>
-                  </a:lnTo>
-                  <a:lnTo>
-                    <a:pt x="6231159" y="530214"/>
-                  </a:lnTo>
-                  <a:lnTo>
-                    <a:pt x="6159537" y="522293"/>
-                  </a:lnTo>
-                  <a:lnTo>
-                    <a:pt x="6087914" y="514190"/>
-                  </a:lnTo>
-                  <a:lnTo>
-                    <a:pt x="6016292" y="505899"/>
-                  </a:lnTo>
-                  <a:lnTo>
-                    <a:pt x="5944669" y="497417"/>
-                  </a:lnTo>
-                  <a:lnTo>
-                    <a:pt x="5873047" y="488739"/>
-                  </a:lnTo>
-                  <a:lnTo>
-                    <a:pt x="5801424" y="479861"/>
-                  </a:lnTo>
-                  <a:lnTo>
-                    <a:pt x="5729802" y="470778"/>
-                  </a:lnTo>
-                  <a:lnTo>
-                    <a:pt x="5658179" y="461485"/>
-                  </a:lnTo>
-                  <a:lnTo>
-                    <a:pt x="5586557" y="451977"/>
-                  </a:lnTo>
-                  <a:lnTo>
-                    <a:pt x="5514934" y="442250"/>
-                  </a:lnTo>
-                  <a:lnTo>
-                    <a:pt x="5443311" y="432298"/>
-                  </a:lnTo>
-                  <a:lnTo>
-                    <a:pt x="5371689" y="422116"/>
-                  </a:lnTo>
-                  <a:lnTo>
-                    <a:pt x="5300066" y="411699"/>
-                  </a:lnTo>
-                  <a:lnTo>
-                    <a:pt x="5228444" y="401042"/>
-                  </a:lnTo>
-                  <a:lnTo>
-                    <a:pt x="5156821" y="390138"/>
-                  </a:lnTo>
-                  <a:lnTo>
-                    <a:pt x="5085199" y="378983"/>
-                  </a:lnTo>
-                  <a:lnTo>
-                    <a:pt x="5013576" y="367570"/>
-                  </a:lnTo>
-                  <a:lnTo>
-                    <a:pt x="4941954" y="355894"/>
-                  </a:lnTo>
-                  <a:lnTo>
-                    <a:pt x="4870331" y="343947"/>
-                  </a:lnTo>
-                  <a:lnTo>
-                    <a:pt x="4798709" y="331725"/>
-                  </a:lnTo>
-                  <a:lnTo>
-                    <a:pt x="4727086" y="319221"/>
-                  </a:lnTo>
-                  <a:lnTo>
-                    <a:pt x="4655464" y="306428"/>
-                  </a:lnTo>
-                  <a:lnTo>
-                    <a:pt x="4583841" y="293340"/>
-                  </a:lnTo>
-                  <a:lnTo>
-                    <a:pt x="4512219" y="279949"/>
-                  </a:lnTo>
-                  <a:lnTo>
-                    <a:pt x="4440596" y="266249"/>
-                  </a:lnTo>
-                  <a:lnTo>
-                    <a:pt x="4368974" y="252233"/>
-                  </a:lnTo>
-                  <a:lnTo>
-                    <a:pt x="4297351" y="237893"/>
-                  </a:lnTo>
-                  <a:lnTo>
-                    <a:pt x="4225729" y="223222"/>
-                  </a:lnTo>
-                  <a:lnTo>
-                    <a:pt x="4154106" y="208212"/>
-                  </a:lnTo>
-                  <a:lnTo>
-                    <a:pt x="4082483" y="192855"/>
-                  </a:lnTo>
-                  <a:lnTo>
-                    <a:pt x="4010861" y="177144"/>
-                  </a:lnTo>
-                  <a:lnTo>
-                    <a:pt x="3939238" y="161070"/>
-                  </a:lnTo>
-                  <a:lnTo>
-                    <a:pt x="3867616" y="144624"/>
-                  </a:lnTo>
-                  <a:lnTo>
-                    <a:pt x="3795993" y="127799"/>
-                  </a:lnTo>
-                  <a:lnTo>
-                    <a:pt x="3724371" y="110586"/>
-                  </a:lnTo>
-                  <a:lnTo>
-                    <a:pt x="3652748" y="92975"/>
-                  </a:lnTo>
-                  <a:lnTo>
-                    <a:pt x="3581126" y="74957"/>
-                  </a:lnTo>
-                  <a:lnTo>
-                    <a:pt x="3509503" y="56523"/>
-                  </a:lnTo>
-                  <a:lnTo>
-                    <a:pt x="3437881" y="43448"/>
-                  </a:lnTo>
-                  <a:lnTo>
-                    <a:pt x="3366258" y="42565"/>
-                  </a:lnTo>
-                  <a:lnTo>
-                    <a:pt x="3294636" y="41682"/>
-                  </a:lnTo>
-                  <a:lnTo>
-                    <a:pt x="3223013" y="40797"/>
-                  </a:lnTo>
-                  <a:lnTo>
-                    <a:pt x="3151391" y="39911"/>
-                  </a:lnTo>
-                  <a:lnTo>
-                    <a:pt x="3079768" y="39025"/>
-                  </a:lnTo>
-                  <a:lnTo>
-                    <a:pt x="3008146" y="38137"/>
-                  </a:lnTo>
-                  <a:lnTo>
-                    <a:pt x="2936523" y="37249"/>
-                  </a:lnTo>
-                  <a:lnTo>
-                    <a:pt x="2864901" y="36360"/>
-                  </a:lnTo>
-                  <a:lnTo>
-                    <a:pt x="2793278" y="35469"/>
-                  </a:lnTo>
-                  <a:lnTo>
-                    <a:pt x="2721655" y="34578"/>
-                  </a:lnTo>
-                  <a:lnTo>
-                    <a:pt x="2650033" y="33686"/>
-                  </a:lnTo>
-                  <a:lnTo>
-                    <a:pt x="2578410" y="32793"/>
-                  </a:lnTo>
-                  <a:lnTo>
-                    <a:pt x="2506788" y="31899"/>
-                  </a:lnTo>
-                  <a:lnTo>
-                    <a:pt x="2435165" y="31004"/>
-                  </a:lnTo>
-                  <a:lnTo>
-                    <a:pt x="2363543" y="30108"/>
-                  </a:lnTo>
-                  <a:lnTo>
-                    <a:pt x="2291920" y="29211"/>
-                  </a:lnTo>
-                  <a:lnTo>
-                    <a:pt x="2220298" y="28313"/>
-                  </a:lnTo>
-                  <a:lnTo>
-                    <a:pt x="2148675" y="27414"/>
-                  </a:lnTo>
-                  <a:lnTo>
-                    <a:pt x="2077053" y="26514"/>
-                  </a:lnTo>
-                  <a:lnTo>
-                    <a:pt x="2005430" y="25614"/>
-                  </a:lnTo>
-                  <a:lnTo>
-                    <a:pt x="1933808" y="24712"/>
-                  </a:lnTo>
-                  <a:lnTo>
-                    <a:pt x="1862185" y="23809"/>
-                  </a:lnTo>
-                  <a:lnTo>
-                    <a:pt x="1790563" y="22905"/>
-                  </a:lnTo>
-                  <a:lnTo>
-                    <a:pt x="1718940" y="22001"/>
-                  </a:lnTo>
-                  <a:lnTo>
-                    <a:pt x="1647318" y="21095"/>
-                  </a:lnTo>
-                  <a:lnTo>
-                    <a:pt x="1575695" y="20189"/>
-                  </a:lnTo>
-                  <a:lnTo>
-                    <a:pt x="1504073" y="19281"/>
-                  </a:lnTo>
-                  <a:lnTo>
-                    <a:pt x="1432450" y="18373"/>
-                  </a:lnTo>
-                  <a:lnTo>
-                    <a:pt x="1360827" y="17463"/>
-                  </a:lnTo>
-                  <a:lnTo>
-                    <a:pt x="1289205" y="16553"/>
-                  </a:lnTo>
-                  <a:lnTo>
-                    <a:pt x="1217582" y="15642"/>
-                  </a:lnTo>
-                  <a:lnTo>
-                    <a:pt x="1145960" y="14729"/>
-                  </a:lnTo>
-                  <a:lnTo>
-                    <a:pt x="1074337" y="13816"/>
-                  </a:lnTo>
-                  <a:lnTo>
-                    <a:pt x="1002715" y="12902"/>
-                  </a:lnTo>
-                  <a:lnTo>
-                    <a:pt x="931092" y="11987"/>
-                  </a:lnTo>
-                  <a:lnTo>
-                    <a:pt x="859470" y="11070"/>
-                  </a:lnTo>
-                  <a:lnTo>
-                    <a:pt x="787847" y="10153"/>
-                  </a:lnTo>
-                  <a:lnTo>
-                    <a:pt x="716225" y="9235"/>
-                  </a:lnTo>
-                  <a:lnTo>
-                    <a:pt x="644602" y="8316"/>
-                  </a:lnTo>
-                  <a:lnTo>
-                    <a:pt x="572980" y="7396"/>
-                  </a:lnTo>
-                  <a:lnTo>
-                    <a:pt x="501357" y="6475"/>
-                  </a:lnTo>
-                  <a:lnTo>
-                    <a:pt x="429735" y="5553"/>
-                  </a:lnTo>
-                  <a:lnTo>
-                    <a:pt x="358112" y="4630"/>
-                  </a:lnTo>
-                  <a:lnTo>
-                    <a:pt x="286490" y="3706"/>
-                  </a:lnTo>
-                  <a:lnTo>
-                    <a:pt x="214867" y="2780"/>
-                  </a:lnTo>
-                  <a:lnTo>
-                    <a:pt x="143245" y="1854"/>
-                  </a:lnTo>
-                  <a:lnTo>
-                    <a:pt x="71622" y="927"/>
+                    <a:pt x="7019007" y="601163"/>
+                  </a:lnTo>
+                  <a:lnTo>
+                    <a:pt x="6947385" y="594969"/>
+                  </a:lnTo>
+                  <a:lnTo>
+                    <a:pt x="6875762" y="588631"/>
+                  </a:lnTo>
+                  <a:lnTo>
+                    <a:pt x="6804139" y="582148"/>
+                  </a:lnTo>
+                  <a:lnTo>
+                    <a:pt x="6732517" y="575515"/>
+                  </a:lnTo>
+                  <a:lnTo>
+                    <a:pt x="6660894" y="568730"/>
+                  </a:lnTo>
+                  <a:lnTo>
+                    <a:pt x="6589272" y="561789"/>
+                  </a:lnTo>
+                  <a:lnTo>
+                    <a:pt x="6517649" y="554688"/>
+                  </a:lnTo>
+                  <a:lnTo>
+                    <a:pt x="6446027" y="547423"/>
+                  </a:lnTo>
+                  <a:lnTo>
+                    <a:pt x="6374404" y="539992"/>
+                  </a:lnTo>
+                  <a:lnTo>
+                    <a:pt x="6302782" y="532389"/>
+                  </a:lnTo>
+                  <a:lnTo>
+                    <a:pt x="6231159" y="524611"/>
+                  </a:lnTo>
+                  <a:lnTo>
+                    <a:pt x="6159537" y="516654"/>
+                  </a:lnTo>
+                  <a:lnTo>
+                    <a:pt x="6087914" y="508514"/>
+                  </a:lnTo>
+                  <a:lnTo>
+                    <a:pt x="6016292" y="500187"/>
+                  </a:lnTo>
+                  <a:lnTo>
+                    <a:pt x="5944669" y="491668"/>
+                  </a:lnTo>
+                  <a:lnTo>
+                    <a:pt x="5873047" y="482953"/>
+                  </a:lnTo>
+                  <a:lnTo>
+                    <a:pt x="5801424" y="474037"/>
+                  </a:lnTo>
+                  <a:lnTo>
+                    <a:pt x="5729802" y="464916"/>
+                  </a:lnTo>
+                  <a:lnTo>
+                    <a:pt x="5658179" y="455586"/>
+                  </a:lnTo>
+                  <a:lnTo>
+                    <a:pt x="5586557" y="446040"/>
+                  </a:lnTo>
+                  <a:lnTo>
+                    <a:pt x="5514934" y="436275"/>
+                  </a:lnTo>
+                  <a:lnTo>
+                    <a:pt x="5443311" y="426285"/>
+                  </a:lnTo>
+                  <a:lnTo>
+                    <a:pt x="5371689" y="416065"/>
+                  </a:lnTo>
+                  <a:lnTo>
+                    <a:pt x="5300066" y="405610"/>
+                  </a:lnTo>
+                  <a:lnTo>
+                    <a:pt x="5228444" y="394914"/>
+                  </a:lnTo>
+                  <a:lnTo>
+                    <a:pt x="5156821" y="383972"/>
+                  </a:lnTo>
+                  <a:lnTo>
+                    <a:pt x="5085199" y="372778"/>
+                  </a:lnTo>
+                  <a:lnTo>
+                    <a:pt x="5013576" y="361327"/>
+                  </a:lnTo>
+                  <a:lnTo>
+                    <a:pt x="4941954" y="349612"/>
+                  </a:lnTo>
+                  <a:lnTo>
+                    <a:pt x="4870331" y="337627"/>
+                  </a:lnTo>
+                  <a:lnTo>
+                    <a:pt x="4798709" y="325366"/>
+                  </a:lnTo>
+                  <a:lnTo>
+                    <a:pt x="4727086" y="312824"/>
+                  </a:lnTo>
+                  <a:lnTo>
+                    <a:pt x="4655464" y="299992"/>
+                  </a:lnTo>
+                  <a:lnTo>
+                    <a:pt x="4583841" y="286866"/>
+                  </a:lnTo>
+                  <a:lnTo>
+                    <a:pt x="4512219" y="273437"/>
+                  </a:lnTo>
+                  <a:lnTo>
+                    <a:pt x="4440596" y="259699"/>
+                  </a:lnTo>
+                  <a:lnTo>
+                    <a:pt x="4368974" y="245644"/>
+                  </a:lnTo>
+                  <a:lnTo>
+                    <a:pt x="4297351" y="231267"/>
+                  </a:lnTo>
+                  <a:lnTo>
+                    <a:pt x="4225729" y="216558"/>
+                  </a:lnTo>
+                  <a:lnTo>
+                    <a:pt x="4154106" y="201511"/>
+                  </a:lnTo>
+                  <a:lnTo>
+                    <a:pt x="4082483" y="186118"/>
+                  </a:lnTo>
+                  <a:lnTo>
+                    <a:pt x="4010861" y="170370"/>
+                  </a:lnTo>
+                  <a:lnTo>
+                    <a:pt x="3939238" y="154260"/>
+                  </a:lnTo>
+                  <a:lnTo>
+                    <a:pt x="3867616" y="137779"/>
+                  </a:lnTo>
+                  <a:lnTo>
+                    <a:pt x="3795993" y="120918"/>
+                  </a:lnTo>
+                  <a:lnTo>
+                    <a:pt x="3724371" y="103670"/>
+                  </a:lnTo>
+                  <a:lnTo>
+                    <a:pt x="3652748" y="86024"/>
+                  </a:lnTo>
+                  <a:lnTo>
+                    <a:pt x="3581126" y="67973"/>
+                  </a:lnTo>
+                  <a:lnTo>
+                    <a:pt x="3509503" y="49506"/>
+                  </a:lnTo>
+                  <a:lnTo>
+                    <a:pt x="3437881" y="40403"/>
+                  </a:lnTo>
+                  <a:lnTo>
+                    <a:pt x="3366258" y="39581"/>
+                  </a:lnTo>
+                  <a:lnTo>
+                    <a:pt x="3294636" y="38758"/>
+                  </a:lnTo>
+                  <a:lnTo>
+                    <a:pt x="3223013" y="37934"/>
+                  </a:lnTo>
+                  <a:lnTo>
+                    <a:pt x="3151391" y="37109"/>
+                  </a:lnTo>
+                  <a:lnTo>
+                    <a:pt x="3079768" y="36284"/>
+                  </a:lnTo>
+                  <a:lnTo>
+                    <a:pt x="3008146" y="35457"/>
+                  </a:lnTo>
+                  <a:lnTo>
+                    <a:pt x="2936523" y="34630"/>
+                  </a:lnTo>
+                  <a:lnTo>
+                    <a:pt x="2864901" y="33802"/>
+                  </a:lnTo>
+                  <a:lnTo>
+                    <a:pt x="2793278" y="32973"/>
+                  </a:lnTo>
+                  <a:lnTo>
+                    <a:pt x="2721655" y="32144"/>
+                  </a:lnTo>
+                  <a:lnTo>
+                    <a:pt x="2650033" y="31313"/>
+                  </a:lnTo>
+                  <a:lnTo>
+                    <a:pt x="2578410" y="30482"/>
+                  </a:lnTo>
+                  <a:lnTo>
+                    <a:pt x="2506788" y="29650"/>
+                  </a:lnTo>
+                  <a:lnTo>
+                    <a:pt x="2435165" y="28817"/>
+                  </a:lnTo>
+                  <a:lnTo>
+                    <a:pt x="2363543" y="27983"/>
+                  </a:lnTo>
+                  <a:lnTo>
+                    <a:pt x="2291920" y="27148"/>
+                  </a:lnTo>
+                  <a:lnTo>
+                    <a:pt x="2220298" y="26313"/>
+                  </a:lnTo>
+                  <a:lnTo>
+                    <a:pt x="2148675" y="25477"/>
+                  </a:lnTo>
+                  <a:lnTo>
+                    <a:pt x="2077053" y="24640"/>
+                  </a:lnTo>
+                  <a:lnTo>
+                    <a:pt x="2005430" y="23802"/>
+                  </a:lnTo>
+                  <a:lnTo>
+                    <a:pt x="1933808" y="22963"/>
+                  </a:lnTo>
+                  <a:lnTo>
+                    <a:pt x="1862185" y="22123"/>
+                  </a:lnTo>
+                  <a:lnTo>
+                    <a:pt x="1790563" y="21283"/>
+                  </a:lnTo>
+                  <a:lnTo>
+                    <a:pt x="1718940" y="20442"/>
+                  </a:lnTo>
+                  <a:lnTo>
+                    <a:pt x="1647318" y="19599"/>
+                  </a:lnTo>
+                  <a:lnTo>
+                    <a:pt x="1575695" y="18757"/>
+                  </a:lnTo>
+                  <a:lnTo>
+                    <a:pt x="1504073" y="17913"/>
+                  </a:lnTo>
+                  <a:lnTo>
+                    <a:pt x="1432450" y="17068"/>
+                  </a:lnTo>
+                  <a:lnTo>
+                    <a:pt x="1360827" y="16223"/>
+                  </a:lnTo>
+                  <a:lnTo>
+                    <a:pt x="1289205" y="15377"/>
+                  </a:lnTo>
+                  <a:lnTo>
+                    <a:pt x="1217582" y="14529"/>
+                  </a:lnTo>
+                  <a:lnTo>
+                    <a:pt x="1145960" y="13681"/>
+                  </a:lnTo>
+                  <a:lnTo>
+                    <a:pt x="1074337" y="12833"/>
+                  </a:lnTo>
+                  <a:lnTo>
+                    <a:pt x="1002715" y="11983"/>
+                  </a:lnTo>
+                  <a:lnTo>
+                    <a:pt x="931092" y="11133"/>
+                  </a:lnTo>
+                  <a:lnTo>
+                    <a:pt x="859470" y="10281"/>
+                  </a:lnTo>
+                  <a:lnTo>
+                    <a:pt x="787847" y="9429"/>
+                  </a:lnTo>
+                  <a:lnTo>
+                    <a:pt x="716225" y="8576"/>
+                  </a:lnTo>
+                  <a:lnTo>
+                    <a:pt x="644602" y="7722"/>
+                  </a:lnTo>
+                  <a:lnTo>
+                    <a:pt x="572980" y="6868"/>
+                  </a:lnTo>
+                  <a:lnTo>
+                    <a:pt x="501357" y="6012"/>
+                  </a:lnTo>
+                  <a:lnTo>
+                    <a:pt x="429735" y="5156"/>
+                  </a:lnTo>
+                  <a:lnTo>
+                    <a:pt x="358112" y="4298"/>
+                  </a:lnTo>
+                  <a:lnTo>
+                    <a:pt x="286490" y="3440"/>
+                  </a:lnTo>
+                  <a:lnTo>
+                    <a:pt x="214867" y="2581"/>
+                  </a:lnTo>
+                  <a:lnTo>
+                    <a:pt x="143245" y="1722"/>
+                  </a:lnTo>
+                  <a:lnTo>
+                    <a:pt x="71622" y="861"/>
                   </a:lnTo>
                   <a:lnTo>
                     <a:pt x="0" y="0"/>
@@ -4326,312 +4326,312 @@
           </p:nvSpPr>
           <p:spPr>
             <a:xfrm>
-              <a:off x="1172049" y="4079837"/>
-              <a:ext cx="7090630" cy="1024682"/>
+              <a:off x="1172049" y="4081264"/>
+              <a:ext cx="7090630" cy="1020369"/>
             </a:xfrm>
             <a:custGeom>
               <a:avLst/>
               <a:pathLst>
-                <a:path w="7090630" h="1024682">
+                <a:path w="7090630" h="1020369">
                   <a:moveTo>
                     <a:pt x="0" y="0"/>
                   </a:moveTo>
                   <a:lnTo>
-                    <a:pt x="71622" y="17545"/>
-                  </a:lnTo>
-                  <a:lnTo>
-                    <a:pt x="143245" y="34882"/>
-                  </a:lnTo>
-                  <a:lnTo>
-                    <a:pt x="214867" y="52014"/>
-                  </a:lnTo>
-                  <a:lnTo>
-                    <a:pt x="286490" y="68942"/>
-                  </a:lnTo>
-                  <a:lnTo>
-                    <a:pt x="358112" y="85668"/>
-                  </a:lnTo>
-                  <a:lnTo>
-                    <a:pt x="429735" y="102197"/>
-                  </a:lnTo>
-                  <a:lnTo>
-                    <a:pt x="501357" y="118529"/>
-                  </a:lnTo>
-                  <a:lnTo>
-                    <a:pt x="572980" y="134666"/>
-                  </a:lnTo>
-                  <a:lnTo>
-                    <a:pt x="644602" y="150613"/>
-                  </a:lnTo>
-                  <a:lnTo>
-                    <a:pt x="716225" y="166370"/>
-                  </a:lnTo>
-                  <a:lnTo>
-                    <a:pt x="787847" y="181940"/>
-                  </a:lnTo>
-                  <a:lnTo>
-                    <a:pt x="859470" y="197324"/>
-                  </a:lnTo>
-                  <a:lnTo>
-                    <a:pt x="931092" y="212527"/>
-                  </a:lnTo>
-                  <a:lnTo>
-                    <a:pt x="1002715" y="227548"/>
-                  </a:lnTo>
-                  <a:lnTo>
-                    <a:pt x="1074337" y="242392"/>
-                  </a:lnTo>
-                  <a:lnTo>
-                    <a:pt x="1145960" y="257058"/>
-                  </a:lnTo>
-                  <a:lnTo>
-                    <a:pt x="1217582" y="271551"/>
-                  </a:lnTo>
-                  <a:lnTo>
-                    <a:pt x="1289205" y="285872"/>
-                  </a:lnTo>
-                  <a:lnTo>
-                    <a:pt x="1360827" y="300023"/>
-                  </a:lnTo>
-                  <a:lnTo>
-                    <a:pt x="1432450" y="314005"/>
-                  </a:lnTo>
-                  <a:lnTo>
-                    <a:pt x="1504073" y="327822"/>
-                  </a:lnTo>
-                  <a:lnTo>
-                    <a:pt x="1575695" y="341474"/>
-                  </a:lnTo>
-                  <a:lnTo>
-                    <a:pt x="1647318" y="354964"/>
-                  </a:lnTo>
-                  <a:lnTo>
-                    <a:pt x="1718940" y="368294"/>
-                  </a:lnTo>
-                  <a:lnTo>
-                    <a:pt x="1790563" y="381466"/>
-                  </a:lnTo>
-                  <a:lnTo>
-                    <a:pt x="1862185" y="394482"/>
-                  </a:lnTo>
-                  <a:lnTo>
-                    <a:pt x="1933808" y="407342"/>
-                  </a:lnTo>
-                  <a:lnTo>
-                    <a:pt x="2005430" y="420050"/>
-                  </a:lnTo>
-                  <a:lnTo>
-                    <a:pt x="2077053" y="432607"/>
-                  </a:lnTo>
-                  <a:lnTo>
-                    <a:pt x="2148675" y="445015"/>
-                  </a:lnTo>
-                  <a:lnTo>
-                    <a:pt x="2220298" y="457276"/>
-                  </a:lnTo>
-                  <a:lnTo>
-                    <a:pt x="2291920" y="469391"/>
-                  </a:lnTo>
-                  <a:lnTo>
-                    <a:pt x="2363543" y="481362"/>
-                  </a:lnTo>
-                  <a:lnTo>
-                    <a:pt x="2435165" y="493191"/>
-                  </a:lnTo>
-                  <a:lnTo>
-                    <a:pt x="2506788" y="504880"/>
-                  </a:lnTo>
-                  <a:lnTo>
-                    <a:pt x="2578410" y="516429"/>
-                  </a:lnTo>
-                  <a:lnTo>
-                    <a:pt x="2650033" y="527842"/>
-                  </a:lnTo>
-                  <a:lnTo>
-                    <a:pt x="2721655" y="539119"/>
-                  </a:lnTo>
-                  <a:lnTo>
-                    <a:pt x="2793278" y="550262"/>
-                  </a:lnTo>
-                  <a:lnTo>
-                    <a:pt x="2864901" y="561273"/>
-                  </a:lnTo>
-                  <a:lnTo>
-                    <a:pt x="2936523" y="572153"/>
-                  </a:lnTo>
-                  <a:lnTo>
-                    <a:pt x="3008146" y="582903"/>
-                  </a:lnTo>
-                  <a:lnTo>
-                    <a:pt x="3079768" y="593527"/>
-                  </a:lnTo>
-                  <a:lnTo>
-                    <a:pt x="3151391" y="604024"/>
-                  </a:lnTo>
-                  <a:lnTo>
-                    <a:pt x="3223013" y="614396"/>
-                  </a:lnTo>
-                  <a:lnTo>
-                    <a:pt x="3294636" y="624645"/>
-                  </a:lnTo>
-                  <a:lnTo>
-                    <a:pt x="3366258" y="634772"/>
-                  </a:lnTo>
-                  <a:lnTo>
-                    <a:pt x="3437881" y="644779"/>
-                  </a:lnTo>
-                  <a:lnTo>
-                    <a:pt x="3509503" y="654668"/>
-                  </a:lnTo>
-                  <a:lnTo>
-                    <a:pt x="3581126" y="664438"/>
-                  </a:lnTo>
-                  <a:lnTo>
-                    <a:pt x="3652748" y="674093"/>
-                  </a:lnTo>
-                  <a:lnTo>
-                    <a:pt x="3724371" y="683633"/>
-                  </a:lnTo>
-                  <a:lnTo>
-                    <a:pt x="3795993" y="693060"/>
-                  </a:lnTo>
-                  <a:lnTo>
-                    <a:pt x="3867616" y="702375"/>
-                  </a:lnTo>
-                  <a:lnTo>
-                    <a:pt x="3939238" y="711579"/>
-                  </a:lnTo>
-                  <a:lnTo>
-                    <a:pt x="4010861" y="720674"/>
-                  </a:lnTo>
-                  <a:lnTo>
-                    <a:pt x="4082483" y="729661"/>
-                  </a:lnTo>
-                  <a:lnTo>
-                    <a:pt x="4154106" y="738541"/>
-                  </a:lnTo>
-                  <a:lnTo>
-                    <a:pt x="4225729" y="747316"/>
-                  </a:lnTo>
-                  <a:lnTo>
-                    <a:pt x="4297351" y="755987"/>
-                  </a:lnTo>
-                  <a:lnTo>
-                    <a:pt x="4368974" y="764554"/>
-                  </a:lnTo>
-                  <a:lnTo>
-                    <a:pt x="4440596" y="773020"/>
-                  </a:lnTo>
-                  <a:lnTo>
-                    <a:pt x="4512219" y="781385"/>
-                  </a:lnTo>
-                  <a:lnTo>
-                    <a:pt x="4583841" y="789651"/>
-                  </a:lnTo>
-                  <a:lnTo>
-                    <a:pt x="4655464" y="797819"/>
-                  </a:lnTo>
-                  <a:lnTo>
-                    <a:pt x="4727086" y="805890"/>
-                  </a:lnTo>
-                  <a:lnTo>
-                    <a:pt x="4798709" y="813865"/>
-                  </a:lnTo>
-                  <a:lnTo>
-                    <a:pt x="4870331" y="821745"/>
-                  </a:lnTo>
-                  <a:lnTo>
-                    <a:pt x="4941954" y="829532"/>
-                  </a:lnTo>
-                  <a:lnTo>
-                    <a:pt x="5013576" y="837226"/>
-                  </a:lnTo>
-                  <a:lnTo>
-                    <a:pt x="5085199" y="844829"/>
-                  </a:lnTo>
-                  <a:lnTo>
-                    <a:pt x="5156821" y="852341"/>
-                  </a:lnTo>
-                  <a:lnTo>
-                    <a:pt x="5228444" y="859764"/>
-                  </a:lnTo>
-                  <a:lnTo>
-                    <a:pt x="5300066" y="867099"/>
-                  </a:lnTo>
-                  <a:lnTo>
-                    <a:pt x="5371689" y="874347"/>
-                  </a:lnTo>
-                  <a:lnTo>
-                    <a:pt x="5443311" y="881509"/>
-                  </a:lnTo>
-                  <a:lnTo>
-                    <a:pt x="5514934" y="888586"/>
-                  </a:lnTo>
-                  <a:lnTo>
-                    <a:pt x="5586557" y="895579"/>
-                  </a:lnTo>
-                  <a:lnTo>
-                    <a:pt x="5658179" y="902489"/>
-                  </a:lnTo>
-                  <a:lnTo>
-                    <a:pt x="5729802" y="909317"/>
-                  </a:lnTo>
-                  <a:lnTo>
-                    <a:pt x="5801424" y="916063"/>
-                  </a:lnTo>
-                  <a:lnTo>
-                    <a:pt x="5873047" y="922730"/>
-                  </a:lnTo>
-                  <a:lnTo>
-                    <a:pt x="5944669" y="929317"/>
-                  </a:lnTo>
-                  <a:lnTo>
-                    <a:pt x="6016292" y="935826"/>
-                  </a:lnTo>
-                  <a:lnTo>
-                    <a:pt x="6087914" y="942258"/>
-                  </a:lnTo>
-                  <a:lnTo>
-                    <a:pt x="6159537" y="948613"/>
-                  </a:lnTo>
-                  <a:lnTo>
-                    <a:pt x="6231159" y="954893"/>
-                  </a:lnTo>
-                  <a:lnTo>
-                    <a:pt x="6302782" y="961099"/>
-                  </a:lnTo>
-                  <a:lnTo>
-                    <a:pt x="6374404" y="967231"/>
-                  </a:lnTo>
-                  <a:lnTo>
-                    <a:pt x="6446027" y="973289"/>
-                  </a:lnTo>
-                  <a:lnTo>
-                    <a:pt x="6517649" y="979276"/>
-                  </a:lnTo>
-                  <a:lnTo>
-                    <a:pt x="6589272" y="985192"/>
-                  </a:lnTo>
-                  <a:lnTo>
-                    <a:pt x="6660894" y="991038"/>
-                  </a:lnTo>
-                  <a:lnTo>
-                    <a:pt x="6732517" y="996814"/>
-                  </a:lnTo>
-                  <a:lnTo>
-                    <a:pt x="6804139" y="1002521"/>
-                  </a:lnTo>
-                  <a:lnTo>
-                    <a:pt x="6875762" y="1008161"/>
-                  </a:lnTo>
-                  <a:lnTo>
-                    <a:pt x="6947385" y="1013734"/>
-                  </a:lnTo>
-                  <a:lnTo>
-                    <a:pt x="7019007" y="1019240"/>
-                  </a:lnTo>
-                  <a:lnTo>
-                    <a:pt x="7090630" y="1024682"/>
+                    <a:pt x="71622" y="17420"/>
+                  </a:lnTo>
+                  <a:lnTo>
+                    <a:pt x="143245" y="34635"/>
+                  </a:lnTo>
+                  <a:lnTo>
+                    <a:pt x="214867" y="51647"/>
+                  </a:lnTo>
+                  <a:lnTo>
+                    <a:pt x="286490" y="68459"/>
+                  </a:lnTo>
+                  <a:lnTo>
+                    <a:pt x="358112" y="85071"/>
+                  </a:lnTo>
+                  <a:lnTo>
+                    <a:pt x="429735" y="101488"/>
+                  </a:lnTo>
+                  <a:lnTo>
+                    <a:pt x="501357" y="117711"/>
+                  </a:lnTo>
+                  <a:lnTo>
+                    <a:pt x="572980" y="133743"/>
+                  </a:lnTo>
+                  <a:lnTo>
+                    <a:pt x="644602" y="149585"/>
+                  </a:lnTo>
+                  <a:lnTo>
+                    <a:pt x="716225" y="165240"/>
+                  </a:lnTo>
+                  <a:lnTo>
+                    <a:pt x="787847" y="180711"/>
+                  </a:lnTo>
+                  <a:lnTo>
+                    <a:pt x="859470" y="195998"/>
+                  </a:lnTo>
+                  <a:lnTo>
+                    <a:pt x="931092" y="211106"/>
+                  </a:lnTo>
+                  <a:lnTo>
+                    <a:pt x="1002715" y="226035"/>
+                  </a:lnTo>
+                  <a:lnTo>
+                    <a:pt x="1074337" y="240788"/>
+                  </a:lnTo>
+                  <a:lnTo>
+                    <a:pt x="1145960" y="255367"/>
+                  </a:lnTo>
+                  <a:lnTo>
+                    <a:pt x="1217582" y="269774"/>
+                  </a:lnTo>
+                  <a:lnTo>
+                    <a:pt x="1289205" y="284010"/>
+                  </a:lnTo>
+                  <a:lnTo>
+                    <a:pt x="1360827" y="298079"/>
+                  </a:lnTo>
+                  <a:lnTo>
+                    <a:pt x="1432450" y="311982"/>
+                  </a:lnTo>
+                  <a:lnTo>
+                    <a:pt x="1504073" y="325720"/>
+                  </a:lnTo>
+                  <a:lnTo>
+                    <a:pt x="1575695" y="339296"/>
+                  </a:lnTo>
+                  <a:lnTo>
+                    <a:pt x="1647318" y="352713"/>
+                  </a:lnTo>
+                  <a:lnTo>
+                    <a:pt x="1718940" y="365970"/>
+                  </a:lnTo>
+                  <a:lnTo>
+                    <a:pt x="1790563" y="379072"/>
+                  </a:lnTo>
+                  <a:lnTo>
+                    <a:pt x="1862185" y="392018"/>
+                  </a:lnTo>
+                  <a:lnTo>
+                    <a:pt x="1933808" y="404812"/>
+                  </a:lnTo>
+                  <a:lnTo>
+                    <a:pt x="2005430" y="417455"/>
+                  </a:lnTo>
+                  <a:lnTo>
+                    <a:pt x="2077053" y="429949"/>
+                  </a:lnTo>
+                  <a:lnTo>
+                    <a:pt x="2148675" y="442295"/>
+                  </a:lnTo>
+                  <a:lnTo>
+                    <a:pt x="2220298" y="454495"/>
+                  </a:lnTo>
+                  <a:lnTo>
+                    <a:pt x="2291920" y="466552"/>
+                  </a:lnTo>
+                  <a:lnTo>
+                    <a:pt x="2363543" y="478466"/>
+                  </a:lnTo>
+                  <a:lnTo>
+                    <a:pt x="2435165" y="490239"/>
+                  </a:lnTo>
+                  <a:lnTo>
+                    <a:pt x="2506788" y="501874"/>
+                  </a:lnTo>
+                  <a:lnTo>
+                    <a:pt x="2578410" y="513371"/>
+                  </a:lnTo>
+                  <a:lnTo>
+                    <a:pt x="2650033" y="524733"/>
+                  </a:lnTo>
+                  <a:lnTo>
+                    <a:pt x="2721655" y="535960"/>
+                  </a:lnTo>
+                  <a:lnTo>
+                    <a:pt x="2793278" y="547055"/>
+                  </a:lnTo>
+                  <a:lnTo>
+                    <a:pt x="2864901" y="558019"/>
+                  </a:lnTo>
+                  <a:lnTo>
+                    <a:pt x="2936523" y="568854"/>
+                  </a:lnTo>
+                  <a:lnTo>
+                    <a:pt x="3008146" y="579561"/>
+                  </a:lnTo>
+                  <a:lnTo>
+                    <a:pt x="3079768" y="590141"/>
+                  </a:lnTo>
+                  <a:lnTo>
+                    <a:pt x="3151391" y="600596"/>
+                  </a:lnTo>
+                  <a:lnTo>
+                    <a:pt x="3223013" y="610928"/>
+                  </a:lnTo>
+                  <a:lnTo>
+                    <a:pt x="3294636" y="621139"/>
+                  </a:lnTo>
+                  <a:lnTo>
+                    <a:pt x="3366258" y="631228"/>
+                  </a:lnTo>
+                  <a:lnTo>
+                    <a:pt x="3437881" y="641199"/>
+                  </a:lnTo>
+                  <a:lnTo>
+                    <a:pt x="3509503" y="651051"/>
+                  </a:lnTo>
+                  <a:lnTo>
+                    <a:pt x="3581126" y="660788"/>
+                  </a:lnTo>
+                  <a:lnTo>
+                    <a:pt x="3652748" y="670410"/>
+                  </a:lnTo>
+                  <a:lnTo>
+                    <a:pt x="3724371" y="679918"/>
+                  </a:lnTo>
+                  <a:lnTo>
+                    <a:pt x="3795993" y="689314"/>
+                  </a:lnTo>
+                  <a:lnTo>
+                    <a:pt x="3867616" y="698599"/>
+                  </a:lnTo>
+                  <a:lnTo>
+                    <a:pt x="3939238" y="707774"/>
+                  </a:lnTo>
+                  <a:lnTo>
+                    <a:pt x="4010861" y="716841"/>
+                  </a:lnTo>
+                  <a:lnTo>
+                    <a:pt x="4082483" y="725801"/>
+                  </a:lnTo>
+                  <a:lnTo>
+                    <a:pt x="4154106" y="734655"/>
+                  </a:lnTo>
+                  <a:lnTo>
+                    <a:pt x="4225729" y="743405"/>
+                  </a:lnTo>
+                  <a:lnTo>
+                    <a:pt x="4297351" y="752052"/>
+                  </a:lnTo>
+                  <a:lnTo>
+                    <a:pt x="4368974" y="760596"/>
+                  </a:lnTo>
+                  <a:lnTo>
+                    <a:pt x="4440596" y="769040"/>
+                  </a:lnTo>
+                  <a:lnTo>
+                    <a:pt x="4512219" y="777384"/>
+                  </a:lnTo>
+                  <a:lnTo>
+                    <a:pt x="4583841" y="785629"/>
+                  </a:lnTo>
+                  <a:lnTo>
+                    <a:pt x="4655464" y="793777"/>
+                  </a:lnTo>
+                  <a:lnTo>
+                    <a:pt x="4727086" y="801829"/>
+                  </a:lnTo>
+                  <a:lnTo>
+                    <a:pt x="4798709" y="809786"/>
+                  </a:lnTo>
+                  <a:lnTo>
+                    <a:pt x="4870331" y="817649"/>
+                  </a:lnTo>
+                  <a:lnTo>
+                    <a:pt x="4941954" y="825419"/>
+                  </a:lnTo>
+                  <a:lnTo>
+                    <a:pt x="5013576" y="833098"/>
+                  </a:lnTo>
+                  <a:lnTo>
+                    <a:pt x="5085199" y="840686"/>
+                  </a:lnTo>
+                  <a:lnTo>
+                    <a:pt x="5156821" y="848184"/>
+                  </a:lnTo>
+                  <a:lnTo>
+                    <a:pt x="5228444" y="855594"/>
+                  </a:lnTo>
+                  <a:lnTo>
+                    <a:pt x="5300066" y="862916"/>
+                  </a:lnTo>
+                  <a:lnTo>
+                    <a:pt x="5371689" y="870152"/>
+                  </a:lnTo>
+                  <a:lnTo>
+                    <a:pt x="5443311" y="877303"/>
+                  </a:lnTo>
+                  <a:lnTo>
+                    <a:pt x="5514934" y="884369"/>
+                  </a:lnTo>
+                  <a:lnTo>
+                    <a:pt x="5586557" y="891352"/>
+                  </a:lnTo>
+                  <a:lnTo>
+                    <a:pt x="5658179" y="898252"/>
+                  </a:lnTo>
+                  <a:lnTo>
+                    <a:pt x="5729802" y="905071"/>
+                  </a:lnTo>
+                  <a:lnTo>
+                    <a:pt x="5801424" y="911809"/>
+                  </a:lnTo>
+                  <a:lnTo>
+                    <a:pt x="5873047" y="918468"/>
+                  </a:lnTo>
+                  <a:lnTo>
+                    <a:pt x="5944669" y="925048"/>
+                  </a:lnTo>
+                  <a:lnTo>
+                    <a:pt x="6016292" y="931551"/>
+                  </a:lnTo>
+                  <a:lnTo>
+                    <a:pt x="6087914" y="937977"/>
+                  </a:lnTo>
+                  <a:lnTo>
+                    <a:pt x="6159537" y="944327"/>
+                  </a:lnTo>
+                  <a:lnTo>
+                    <a:pt x="6231159" y="950602"/>
+                  </a:lnTo>
+                  <a:lnTo>
+                    <a:pt x="6302782" y="956803"/>
+                  </a:lnTo>
+                  <a:lnTo>
+                    <a:pt x="6374404" y="962931"/>
+                  </a:lnTo>
+                  <a:lnTo>
+                    <a:pt x="6446027" y="968986"/>
+                  </a:lnTo>
+                  <a:lnTo>
+                    <a:pt x="6517649" y="974970"/>
+                  </a:lnTo>
+                  <a:lnTo>
+                    <a:pt x="6589272" y="980884"/>
+                  </a:lnTo>
+                  <a:lnTo>
+                    <a:pt x="6660894" y="986727"/>
+                  </a:lnTo>
+                  <a:lnTo>
+                    <a:pt x="6732517" y="992502"/>
+                  </a:lnTo>
+                  <a:lnTo>
+                    <a:pt x="6804139" y="998208"/>
+                  </a:lnTo>
+                  <a:lnTo>
+                    <a:pt x="6875762" y="1003847"/>
+                  </a:lnTo>
+                  <a:lnTo>
+                    <a:pt x="6947385" y="1009420"/>
+                  </a:lnTo>
+                  <a:lnTo>
+                    <a:pt x="7019007" y="1014927"/>
+                  </a:lnTo>
+                  <a:lnTo>
+                    <a:pt x="7090630" y="1020369"/>
                   </a:lnTo>
                 </a:path>
               </a:pathLst>
@@ -4703,7 +4703,7 @@
           </p:nvSpPr>
           <p:spPr>
             <a:xfrm>
-              <a:off x="4632789" y="2073503"/>
+              <a:off x="4648520" y="2073503"/>
               <a:ext cx="0" cy="3649639"/>
             </a:xfrm>
             <a:custGeom>
@@ -4746,7 +4746,7 @@
           </p:nvSpPr>
           <p:spPr>
             <a:xfrm>
-              <a:off x="3519238" y="2073503"/>
+              <a:off x="3510041" y="2073503"/>
               <a:ext cx="0" cy="3649639"/>
             </a:xfrm>
             <a:custGeom>
@@ -4789,7 +4789,7 @@
           </p:nvSpPr>
           <p:spPr>
             <a:xfrm>
-              <a:off x="5667105" y="2073503"/>
+              <a:off x="5671562" y="2073503"/>
               <a:ext cx="0" cy="3649639"/>
             </a:xfrm>
             <a:custGeom>
@@ -5062,7 +5062,7 @@
           </p:nvSpPr>
           <p:spPr>
             <a:xfrm>
-              <a:off x="1701509" y="5785772"/>
+              <a:off x="1701133" y="5785772"/>
               <a:ext cx="161574" cy="80101"/>
             </a:xfrm>
             <a:prstGeom prst="rect">
@@ -5108,7 +5108,7 @@
           </p:nvSpPr>
           <p:spPr>
             <a:xfrm>
-              <a:off x="3528691" y="5785772"/>
+              <a:off x="3525106" y="5785772"/>
               <a:ext cx="161574" cy="80101"/>
             </a:xfrm>
             <a:prstGeom prst="rect">
@@ -5154,7 +5154,7 @@
           </p:nvSpPr>
           <p:spPr>
             <a:xfrm>
-              <a:off x="5405571" y="5785772"/>
+              <a:off x="5398776" y="5785772"/>
               <a:ext cx="62179" cy="80101"/>
             </a:xfrm>
             <a:prstGeom prst="rect">
@@ -5200,7 +5200,7 @@
           </p:nvSpPr>
           <p:spPr>
             <a:xfrm>
-              <a:off x="7201663" y="5785772"/>
+              <a:off x="7191659" y="5785772"/>
               <a:ext cx="124358" cy="80101"/>
             </a:xfrm>
             <a:prstGeom prst="rect">
@@ -5371,7 +5371,7 @@
                   <a:latin typeface="Helvetica"/>
                   <a:cs typeface="Helvetica"/>
                 </a:rPr>
-                <a:t>subHR per 10 % decline: 1.16 (1.01-1.34), p_Bonf = 0.189 (n = 6)  |  per IQR decline (Δ = 23.5 %): 1.43 (1.03-1.98)  |  IQR: [-21.0, 2.5] %</a:t>
+                <a:t>subHR per 10 % decline: 1.16 (1.01-1.34), p_Bonf = 0.195 (n = 6)  |  per IQR decline (Δ = 23.7 %): 1.43 (1.03-1.99)  |  IQR: [-21.1, 2.7] %</a:t>
               </a:r>
             </a:p>
           </p:txBody>
